--- a/lectures/lecture02_node_embeddings.pptx
+++ b/lectures/lecture02_node_embeddings.pptx
@@ -329,7 +329,7 @@
               </a:lnSpc>
               <a:buNone/>
             </a:pPr>
-            <a:fld id="{505F9A05-9E1D-4512-B04F-6FB7121A5FD2}" type="slidenum">
+            <a:fld id="{FCB18AC9-42BA-4EC0-90ED-51FAF4AFBAD0}" type="slidenum">
               <a:rPr b="0" lang="en-US" sz="1200" strike="noStrike" u="none">
                 <a:solidFill>
                   <a:schemeClr val="dk1">
@@ -893,7 +893,7 @@
               </a:lnSpc>
               <a:buNone/>
             </a:pPr>
-            <a:fld id="{28403AC1-FE1D-4C9E-AE0D-7E834DEDB97D}" type="slidenum">
+            <a:fld id="{2A54CED1-263E-47FA-9574-A449A6552F03}" type="slidenum">
               <a:rPr b="0" lang="en-US" sz="1200" strike="noStrike" u="none">
                 <a:solidFill>
                   <a:schemeClr val="dk1">
@@ -1511,7 +1511,7 @@
               </a:lnSpc>
               <a:buNone/>
             </a:pPr>
-            <a:fld id="{4C4458F1-B0F3-440C-B422-BF946AD6A148}" type="slidenum">
+            <a:fld id="{1F9876A1-EAC4-403C-B698-B6F148533185}" type="slidenum">
               <a:rPr b="0" lang="en-US" sz="1200" strike="noStrike" u="none">
                 <a:solidFill>
                   <a:schemeClr val="dk1">
@@ -2013,7 +2013,7 @@
               </a:lnSpc>
               <a:buNone/>
             </a:pPr>
-            <a:fld id="{F3731EAA-E24D-46A8-9362-AF56B2D270EA}" type="slidenum">
+            <a:fld id="{2950475E-3B2A-4E1A-A038-B66EF2B505AF}" type="slidenum">
               <a:rPr b="0" lang="en-US" sz="1200" strike="noStrike" u="none">
                 <a:solidFill>
                   <a:schemeClr val="dk1">
@@ -2515,7 +2515,7 @@
               </a:lnSpc>
               <a:buNone/>
             </a:pPr>
-            <a:fld id="{771EFB8B-E4FB-4A84-BAEF-BE762CC04DC7}" type="slidenum">
+            <a:fld id="{9F892CE8-8CA5-4520-A54F-9EE5AD87677D}" type="slidenum">
               <a:rPr b="0" lang="en-US" sz="1200" strike="noStrike" u="none">
                 <a:solidFill>
                   <a:schemeClr val="dk1">
@@ -3017,7 +3017,7 @@
               </a:lnSpc>
               <a:buNone/>
             </a:pPr>
-            <a:fld id="{03127B91-E3F1-4D1F-9961-0907E5C4589D}" type="slidenum">
+            <a:fld id="{406AC01A-FFC1-49D6-B1B8-29E425B0BE05}" type="slidenum">
               <a:rPr b="0" lang="en-US" sz="1200" strike="noStrike" u="none">
                 <a:solidFill>
                   <a:schemeClr val="dk1">
@@ -3384,7 +3384,7 @@
               </a:lnSpc>
               <a:buNone/>
             </a:pPr>
-            <a:fld id="{17DE5AEB-2E0E-44F7-B112-3A13158BC3BC}" type="slidenum">
+            <a:fld id="{E1FB1371-27E5-4043-902F-C0FF69C0FEE5}" type="slidenum">
               <a:rPr b="0" lang="en-US" sz="1200" strike="noStrike" u="none">
                 <a:solidFill>
                   <a:schemeClr val="dk1">
@@ -4085,7 +4085,7 @@
               </a:lnSpc>
               <a:buNone/>
             </a:pPr>
-            <a:fld id="{D378BBF4-A2A5-4CDE-A146-DC55C03B34E1}" type="slidenum">
+            <a:fld id="{9D6E4D1E-CFE6-4C7E-B8C6-207464DA3771}" type="slidenum">
               <a:rPr b="0" lang="en-US" sz="1200" strike="noStrike" u="none">
                 <a:solidFill>
                   <a:schemeClr val="dk1">
@@ -4910,7 +4910,7 @@
               </a:lnSpc>
               <a:buNone/>
             </a:pPr>
-            <a:fld id="{687ED4F7-FDF5-4728-97F1-101ECFE2C0F2}" type="slidenum">
+            <a:fld id="{46BC78B5-1E76-426D-B792-7543059B35E5}" type="slidenum">
               <a:rPr b="0" lang="en-US" sz="1200" strike="noStrike" u="none">
                 <a:solidFill>
                   <a:schemeClr val="dk1">
@@ -5213,7 +5213,7 @@
               </a:lnSpc>
               <a:buNone/>
             </a:pPr>
-            <a:fld id="{C2ED1F55-E301-4328-B700-603D489DE920}" type="slidenum">
+            <a:fld id="{1F2DDA36-3E0E-4D14-A4D7-AC817272A8B2}" type="slidenum">
               <a:rPr b="0" lang="en-US" sz="1200" strike="noStrike" u="none">
                 <a:solidFill>
                   <a:schemeClr val="dk1">
@@ -5460,7 +5460,7 @@
               </a:lnSpc>
               <a:buNone/>
             </a:pPr>
-            <a:fld id="{94DD4E25-D98A-495A-BCC0-B531B96CCEEA}" type="slidenum">
+            <a:fld id="{CF4ADBC0-8B87-40DC-ABC6-26A159380E49}" type="slidenum">
               <a:rPr b="0" lang="en-US" sz="1200" strike="noStrike" u="none">
                 <a:solidFill>
                   <a:schemeClr val="dk1">
@@ -7574,7 +7574,7 @@
           <a:fontRef idx="minor"/>
         </p:style>
         <p:txBody>
-          <a:bodyPr lIns="90000" rIns="90000" tIns="45000" bIns="45000" anchor="ctr">
+          <a:bodyPr wrap="none" lIns="0" rIns="0" tIns="0" bIns="0" anchor="ctr">
             <a:noAutofit/>
           </a:bodyPr>
           <a:p>
@@ -7649,7 +7649,7 @@
           <a:fontRef idx="minor"/>
         </p:style>
         <p:txBody>
-          <a:bodyPr lIns="90000" rIns="90000" tIns="45000" bIns="45000" anchor="ctr">
+          <a:bodyPr wrap="none" lIns="0" rIns="0" tIns="0" bIns="0" anchor="ctr">
             <a:noAutofit/>
           </a:bodyPr>
           <a:p>
@@ -7724,7 +7724,7 @@
           <a:fontRef idx="minor"/>
         </p:style>
         <p:txBody>
-          <a:bodyPr lIns="90000" rIns="90000" tIns="45000" bIns="45000" anchor="ctr">
+          <a:bodyPr wrap="none" lIns="0" rIns="0" tIns="0" bIns="0" anchor="ctr">
             <a:noAutofit/>
           </a:bodyPr>
           <a:p>
@@ -7799,7 +7799,7 @@
           <a:fontRef idx="minor"/>
         </p:style>
         <p:txBody>
-          <a:bodyPr lIns="90000" rIns="90000" tIns="45000" bIns="45000" anchor="ctr">
+          <a:bodyPr wrap="none" lIns="0" rIns="0" tIns="0" bIns="0" anchor="ctr">
             <a:noAutofit/>
           </a:bodyPr>
           <a:p>
@@ -7874,7 +7874,7 @@
           <a:fontRef idx="minor"/>
         </p:style>
         <p:txBody>
-          <a:bodyPr lIns="90000" rIns="90000" tIns="45000" bIns="45000" anchor="ctr">
+          <a:bodyPr wrap="none" lIns="0" rIns="0" tIns="0" bIns="0" anchor="ctr">
             <a:noAutofit/>
           </a:bodyPr>
           <a:p>
@@ -9107,7 +9107,7 @@
           <a:fontRef idx="minor"/>
         </p:style>
         <p:txBody>
-          <a:bodyPr lIns="90000" rIns="90000" tIns="45000" bIns="45000" anchor="ctr">
+          <a:bodyPr wrap="none" lIns="0" rIns="0" tIns="0" bIns="0" anchor="ctr">
             <a:noAutofit/>
           </a:bodyPr>
           <a:p>
@@ -9182,7 +9182,7 @@
           <a:fontRef idx="minor"/>
         </p:style>
         <p:txBody>
-          <a:bodyPr lIns="90000" rIns="90000" tIns="45000" bIns="45000" anchor="ctr">
+          <a:bodyPr wrap="none" lIns="0" rIns="0" tIns="0" bIns="0" anchor="ctr">
             <a:noAutofit/>
           </a:bodyPr>
           <a:p>
@@ -9257,7 +9257,7 @@
           <a:fontRef idx="minor"/>
         </p:style>
         <p:txBody>
-          <a:bodyPr lIns="90000" rIns="90000" tIns="45000" bIns="45000" anchor="ctr">
+          <a:bodyPr wrap="none" lIns="0" rIns="0" tIns="0" bIns="0" anchor="ctr">
             <a:noAutofit/>
           </a:bodyPr>
           <a:p>
@@ -9332,7 +9332,7 @@
           <a:fontRef idx="minor"/>
         </p:style>
         <p:txBody>
-          <a:bodyPr lIns="90000" rIns="90000" tIns="45000" bIns="45000" anchor="ctr">
+          <a:bodyPr wrap="none" lIns="0" rIns="0" tIns="0" bIns="0" anchor="ctr">
             <a:noAutofit/>
           </a:bodyPr>
           <a:p>
@@ -9407,7 +9407,7 @@
           <a:fontRef idx="minor"/>
         </p:style>
         <p:txBody>
-          <a:bodyPr lIns="90000" rIns="90000" tIns="45000" bIns="45000" anchor="ctr">
+          <a:bodyPr wrap="none" lIns="0" rIns="0" tIns="0" bIns="0" anchor="ctr">
             <a:noAutofit/>
           </a:bodyPr>
           <a:p>
@@ -9482,7 +9482,7 @@
           <a:fontRef idx="minor"/>
         </p:style>
         <p:txBody>
-          <a:bodyPr lIns="90000" rIns="90000" tIns="45000" bIns="45000" anchor="ctr">
+          <a:bodyPr wrap="none" lIns="0" rIns="0" tIns="0" bIns="0" anchor="ctr">
             <a:noAutofit/>
           </a:bodyPr>
           <a:p>
@@ -10103,7 +10103,7 @@
           <a:fontRef idx="minor"/>
         </p:style>
         <p:txBody>
-          <a:bodyPr lIns="90000" rIns="90000" tIns="45000" bIns="45000" anchor="ctr">
+          <a:bodyPr wrap="none" lIns="0" rIns="0" tIns="0" bIns="0" anchor="ctr">
             <a:noAutofit/>
           </a:bodyPr>
           <a:p>
@@ -10178,7 +10178,7 @@
           <a:fontRef idx="minor"/>
         </p:style>
         <p:txBody>
-          <a:bodyPr lIns="90000" rIns="90000" tIns="45000" bIns="45000" anchor="ctr">
+          <a:bodyPr wrap="none" lIns="0" rIns="0" tIns="0" bIns="0" anchor="ctr">
             <a:noAutofit/>
           </a:bodyPr>
           <a:p>
@@ -10253,7 +10253,7 @@
           <a:fontRef idx="minor"/>
         </p:style>
         <p:txBody>
-          <a:bodyPr lIns="90000" rIns="90000" tIns="45000" bIns="45000" anchor="ctr">
+          <a:bodyPr wrap="none" lIns="0" rIns="0" tIns="0" bIns="0" anchor="ctr">
             <a:noAutofit/>
           </a:bodyPr>
           <a:p>
@@ -10328,7 +10328,7 @@
           <a:fontRef idx="minor"/>
         </p:style>
         <p:txBody>
-          <a:bodyPr lIns="90000" rIns="90000" tIns="45000" bIns="45000" anchor="ctr">
+          <a:bodyPr wrap="none" lIns="0" rIns="0" tIns="0" bIns="0" anchor="ctr">
             <a:noAutofit/>
           </a:bodyPr>
           <a:p>
@@ -10403,7 +10403,7 @@
           <a:fontRef idx="minor"/>
         </p:style>
         <p:txBody>
-          <a:bodyPr lIns="90000" rIns="90000" tIns="45000" bIns="45000" anchor="ctr">
+          <a:bodyPr wrap="none" lIns="0" rIns="0" tIns="0" bIns="0" anchor="ctr">
             <a:noAutofit/>
           </a:bodyPr>
           <a:p>
@@ -10478,7 +10478,7 @@
           <a:fontRef idx="minor"/>
         </p:style>
         <p:txBody>
-          <a:bodyPr lIns="90000" rIns="90000" tIns="45000" bIns="45000" anchor="ctr">
+          <a:bodyPr wrap="none" lIns="0" rIns="0" tIns="0" bIns="0" anchor="ctr">
             <a:noAutofit/>
           </a:bodyPr>
           <a:p>
@@ -21415,7 +21415,7 @@
           <a:fontRef idx="minor"/>
         </p:style>
         <p:txBody>
-          <a:bodyPr lIns="90000" rIns="90000" tIns="45000" bIns="45000" anchor="ctr">
+          <a:bodyPr wrap="none" lIns="0" rIns="0" tIns="0" bIns="0" anchor="ctr">
             <a:noAutofit/>
           </a:bodyPr>
           <a:p>
@@ -21490,7 +21490,7 @@
           <a:fontRef idx="minor"/>
         </p:style>
         <p:txBody>
-          <a:bodyPr lIns="90000" rIns="90000" tIns="45000" bIns="45000" anchor="ctr">
+          <a:bodyPr wrap="none" lIns="0" rIns="0" tIns="0" bIns="0" anchor="ctr">
             <a:noAutofit/>
           </a:bodyPr>
           <a:p>
@@ -22413,7 +22413,7 @@
           <a:fontRef idx="minor"/>
         </p:style>
         <p:txBody>
-          <a:bodyPr lIns="90000" rIns="90000" tIns="45000" bIns="45000" anchor="ctr">
+          <a:bodyPr wrap="none" lIns="0" rIns="0" tIns="0" bIns="0" anchor="ctr">
             <a:noAutofit/>
           </a:bodyPr>
           <a:p>
@@ -23428,7 +23428,7 @@
           <a:fontRef idx="minor"/>
         </p:style>
         <p:txBody>
-          <a:bodyPr lIns="90000" rIns="90000" tIns="45000" bIns="45000" anchor="ctr">
+          <a:bodyPr wrap="none" lIns="0" rIns="0" tIns="0" bIns="0" anchor="ctr">
             <a:noAutofit/>
           </a:bodyPr>
           <a:p>
@@ -28254,7 +28254,7 @@
         <p:spPr>
           <a:xfrm>
             <a:off x="914400" y="3054240"/>
-            <a:ext cx="10362600" cy="365400"/>
+            <a:ext cx="8259480" cy="365400"/>
           </a:xfrm>
           <a:prstGeom prst="rect">
             <a:avLst/>
@@ -28302,6 +28302,52 @@
               </a:rPr>
               <a:t>Взять большое q: блуждания крутятся в локальной окрестности</a:t>
             </a:r>
+            <a:endParaRPr b="0" lang="ru-RU" sz="1500" strike="noStrike" u="none">
+              <a:solidFill>
+                <a:srgbClr val="000000"/>
+              </a:solidFill>
+              <a:effectLst/>
+              <a:uFillTx/>
+              <a:latin typeface="Arial"/>
+            </a:endParaRPr>
+          </a:p>
+        </p:txBody>
+      </p:sp>
+      <p:sp>
+        <p:nvSpPr>
+          <p:cNvPr id="547" name="TextBox 12"/>
+          <p:cNvSpPr/>
+          <p:nvPr/>
+        </p:nvSpPr>
+        <p:spPr>
+          <a:xfrm>
+            <a:off x="9174240" y="3072240"/>
+            <a:ext cx="2102760" cy="365400"/>
+          </a:xfrm>
+          <a:prstGeom prst="rect">
+            <a:avLst/>
+          </a:prstGeom>
+          <a:noFill/>
+          <a:ln w="0">
+            <a:noFill/>
+          </a:ln>
+        </p:spPr>
+        <p:style>
+          <a:lnRef idx="0"/>
+          <a:fillRef idx="0"/>
+          <a:effectRef idx="0"/>
+          <a:fontRef idx="minor"/>
+        </p:style>
+        <p:txBody>
+          <a:bodyPr lIns="0" rIns="0" tIns="0" bIns="0" anchor="t">
+            <a:spAutoFit/>
+          </a:bodyPr>
+          <a:p>
+            <a:pPr algn="r" defTabSz="457200">
+              <a:lnSpc>
+                <a:spcPct val="100000"/>
+              </a:lnSpc>
+            </a:pPr>
             <a:r>
               <a:rPr b="1" lang="en-US" sz="1300" strike="noStrike" u="none">
                 <a:solidFill>
@@ -28311,7 +28357,7 @@
                 <a:uFillTx/>
                 <a:latin typeface="Arial"/>
               </a:rPr>
-              <a:t>     ✓ правильный ответ</a:t>
+              <a:t>✓ правильный ответ</a:t>
             </a:r>
             <a:endParaRPr b="0" lang="ru-RU" sz="1300" strike="noStrike" u="none">
               <a:solidFill>
@@ -28326,7 +28372,7 @@
       </p:sp>
       <p:sp>
         <p:nvSpPr>
-          <p:cNvPr id="547" name="Rounded Rectangle 12"/>
+          <p:cNvPr id="548" name="Rounded Rectangle 13"/>
           <p:cNvSpPr/>
           <p:nvPr/>
         </p:nvSpPr>
@@ -28392,7 +28438,7 @@
       </p:sp>
       <p:sp>
         <p:nvSpPr>
-          <p:cNvPr id="548" name="TextBox 13"/>
+          <p:cNvPr id="549" name="TextBox 14"/>
           <p:cNvSpPr/>
           <p:nvPr/>
         </p:nvSpPr>
@@ -28460,7 +28506,7 @@
       </p:sp>
       <p:sp>
         <p:nvSpPr>
-          <p:cNvPr id="549" name="Rounded Rectangle 14"/>
+          <p:cNvPr id="550" name="Rounded Rectangle 15"/>
           <p:cNvSpPr/>
           <p:nvPr/>
         </p:nvSpPr>
@@ -28526,7 +28572,7 @@
       </p:sp>
       <p:sp>
         <p:nvSpPr>
-          <p:cNvPr id="550" name="TextBox 15"/>
+          <p:cNvPr id="551" name="TextBox 16"/>
           <p:cNvSpPr/>
           <p:nvPr/>
         </p:nvSpPr>
@@ -28594,7 +28640,7 @@
       </p:sp>
       <p:sp>
         <p:nvSpPr>
-          <p:cNvPr id="551" name="Rounded Rectangle 16"/>
+          <p:cNvPr id="552" name="Rounded Rectangle 17"/>
           <p:cNvSpPr/>
           <p:nvPr/>
         </p:nvSpPr>
@@ -28660,7 +28706,7 @@
       </p:sp>
       <p:sp>
         <p:nvSpPr>
-          <p:cNvPr id="552" name="TextBox 17"/>
+          <p:cNvPr id="553" name="TextBox 18"/>
           <p:cNvSpPr/>
           <p:nvPr/>
         </p:nvSpPr>
@@ -28694,7 +28740,7 @@
               </a:lnSpc>
             </a:pPr>
             <a:r>
-              <a:rPr b="1" lang="en-US" sz="1500" strike="noStrike" u="none">
+              <a:rPr b="1" lang="en-US" sz="1400" strike="noStrike" u="none">
                 <a:solidFill>
                   <a:srgbClr val="e07a3f"/>
                 </a:solidFill>
@@ -28705,7 +28751,7 @@
               <a:t>Почему: </a:t>
             </a:r>
             <a:r>
-              <a:rPr b="0" lang="en-US" sz="1500" strike="noStrike" u="none">
+              <a:rPr b="0" lang="en-US" sz="1400" strike="noStrike" u="none">
                 <a:solidFill>
                   <a:srgbClr val="1a1d26"/>
                 </a:solidFill>
@@ -28715,7 +28761,7 @@
               </a:rPr>
               <a:t>Структурная роль — это свойство ближайшей окрестности: сколько у вершины соседей, как они связаны между собой. Большое q заставляет блуждание топтаться рядом со стартом, и в контекст попадают именно локальные соседи. Маленькое q, наоборот, уводит вглубь — так ловится принадлежность к сообществу, а не роль.</a:t>
             </a:r>
-            <a:endParaRPr b="0" lang="ru-RU" sz="1500" strike="noStrike" u="none">
+            <a:endParaRPr b="0" lang="ru-RU" sz="1400" strike="noStrike" u="none">
               <a:solidFill>
                 <a:srgbClr val="000000"/>
               </a:solidFill>
@@ -28758,7 +28804,7 @@
       </p:grpSpPr>
       <p:sp>
         <p:nvSpPr>
-          <p:cNvPr id="553" name="Rectangle 1"/>
+          <p:cNvPr id="554" name="Rectangle 1"/>
           <p:cNvSpPr/>
           <p:nvPr/>
         </p:nvSpPr>
@@ -28819,7 +28865,7 @@
       </p:sp>
       <p:sp>
         <p:nvSpPr>
-          <p:cNvPr id="554" name="TextBox 2"/>
+          <p:cNvPr id="555" name="TextBox 2"/>
           <p:cNvSpPr/>
           <p:nvPr/>
         </p:nvSpPr>
@@ -28876,7 +28922,7 @@
       </p:sp>
       <p:sp>
         <p:nvSpPr>
-          <p:cNvPr id="555" name="TextBox 3"/>
+          <p:cNvPr id="556" name="TextBox 3"/>
           <p:cNvSpPr/>
           <p:nvPr/>
         </p:nvSpPr>
@@ -28963,7 +29009,7 @@
       </p:grpSpPr>
       <p:sp>
         <p:nvSpPr>
-          <p:cNvPr id="556" name="TextBox 1"/>
+          <p:cNvPr id="557" name="TextBox 1"/>
           <p:cNvSpPr/>
           <p:nvPr/>
         </p:nvSpPr>
@@ -29020,7 +29066,7 @@
       </p:sp>
       <p:sp>
         <p:nvSpPr>
-          <p:cNvPr id="557" name="TextBox 2"/>
+          <p:cNvPr id="558" name="TextBox 2"/>
           <p:cNvSpPr/>
           <p:nvPr/>
         </p:nvSpPr>
@@ -29077,7 +29123,7 @@
       </p:sp>
       <p:cxnSp>
         <p:nvCxnSpPr>
-          <p:cNvPr id="558" name="Connector 3"/>
+          <p:cNvPr id="559" name="Connector 3"/>
           <p:cNvCxnSpPr/>
           <p:nvPr/>
         </p:nvCxnSpPr>
@@ -29099,7 +29145,7 @@
       </p:cxnSp>
       <p:sp>
         <p:nvSpPr>
-          <p:cNvPr id="559" name="TextBox 4"/>
+          <p:cNvPr id="560" name="TextBox 4"/>
           <p:cNvSpPr/>
           <p:nvPr/>
         </p:nvSpPr>
@@ -29156,7 +29202,7 @@
       </p:sp>
       <p:sp>
         <p:nvSpPr>
-          <p:cNvPr id="560" name="TextBox 5"/>
+          <p:cNvPr id="561" name="TextBox 5"/>
           <p:cNvSpPr/>
           <p:nvPr/>
         </p:nvSpPr>
@@ -29213,7 +29259,7 @@
       </p:sp>
       <p:sp>
         <p:nvSpPr>
-          <p:cNvPr id="561" name="Rectangle 6"/>
+          <p:cNvPr id="562" name="Rectangle 6"/>
           <p:cNvSpPr/>
           <p:nvPr/>
         </p:nvSpPr>
@@ -29274,7 +29320,7 @@
       </p:sp>
       <p:sp>
         <p:nvSpPr>
-          <p:cNvPr id="562" name="TextBox 7"/>
+          <p:cNvPr id="563" name="TextBox 7"/>
           <p:cNvSpPr/>
           <p:nvPr/>
         </p:nvSpPr>
@@ -29513,7 +29559,7 @@
       </p:grpSpPr>
       <p:sp>
         <p:nvSpPr>
-          <p:cNvPr id="563" name="TextBox 1"/>
+          <p:cNvPr id="564" name="TextBox 1"/>
           <p:cNvSpPr/>
           <p:nvPr/>
         </p:nvSpPr>
@@ -29570,7 +29616,7 @@
       </p:sp>
       <p:sp>
         <p:nvSpPr>
-          <p:cNvPr id="564" name="TextBox 2"/>
+          <p:cNvPr id="565" name="TextBox 2"/>
           <p:cNvSpPr/>
           <p:nvPr/>
         </p:nvSpPr>
@@ -29627,7 +29673,7 @@
       </p:sp>
       <p:cxnSp>
         <p:nvCxnSpPr>
-          <p:cNvPr id="565" name="Connector 3"/>
+          <p:cNvPr id="566" name="Connector 3"/>
           <p:cNvCxnSpPr/>
           <p:nvPr/>
         </p:nvCxnSpPr>
@@ -29649,7 +29695,7 @@
       </p:cxnSp>
       <p:sp>
         <p:nvSpPr>
-          <p:cNvPr id="566" name="TextBox 4"/>
+          <p:cNvPr id="567" name="TextBox 4"/>
           <p:cNvSpPr/>
           <p:nvPr/>
         </p:nvSpPr>
@@ -29706,7 +29752,7 @@
       </p:sp>
       <p:sp>
         <p:nvSpPr>
-          <p:cNvPr id="567" name="TextBox 5"/>
+          <p:cNvPr id="568" name="TextBox 5"/>
           <p:cNvSpPr/>
           <p:nvPr/>
         </p:nvSpPr>
@@ -29763,7 +29809,7 @@
       </p:sp>
       <p:sp>
         <p:nvSpPr>
-          <p:cNvPr id="568" name="Rectangle 6"/>
+          <p:cNvPr id="569" name="Rectangle 6"/>
           <p:cNvSpPr/>
           <p:nvPr/>
         </p:nvSpPr>
@@ -29824,7 +29870,7 @@
       </p:sp>
       <p:sp>
         <p:nvSpPr>
-          <p:cNvPr id="569" name="TextBox 7"/>
+          <p:cNvPr id="570" name="TextBox 7"/>
           <p:cNvSpPr/>
           <p:nvPr/>
         </p:nvSpPr>
@@ -29870,7 +29916,7 @@
       </p:sp>
       <p:sp>
         <p:nvSpPr>
-          <p:cNvPr id="570" name="TextBox 8"/>
+          <p:cNvPr id="571" name="TextBox 8"/>
           <p:cNvSpPr/>
           <p:nvPr/>
         </p:nvSpPr>
@@ -29927,7 +29973,7 @@
       </p:sp>
       <p:cxnSp>
         <p:nvCxnSpPr>
-          <p:cNvPr id="571" name="Connector 9"/>
+          <p:cNvPr id="572" name="Connector 9"/>
           <p:cNvCxnSpPr/>
           <p:nvPr/>
         </p:nvCxnSpPr>
@@ -29949,7 +29995,7 @@
       </p:cxnSp>
       <p:cxnSp>
         <p:nvCxnSpPr>
-          <p:cNvPr id="572" name="Connector 10"/>
+          <p:cNvPr id="573" name="Connector 10"/>
           <p:cNvCxnSpPr/>
           <p:nvPr/>
         </p:nvCxnSpPr>
@@ -29971,7 +30017,7 @@
       </p:cxnSp>
       <p:cxnSp>
         <p:nvCxnSpPr>
-          <p:cNvPr id="573" name="Connector 11"/>
+          <p:cNvPr id="574" name="Connector 11"/>
           <p:cNvCxnSpPr/>
           <p:nvPr/>
         </p:nvCxnSpPr>
@@ -29993,7 +30039,7 @@
       </p:cxnSp>
       <p:cxnSp>
         <p:nvCxnSpPr>
-          <p:cNvPr id="574" name="Connector 12"/>
+          <p:cNvPr id="575" name="Connector 12"/>
           <p:cNvCxnSpPr/>
           <p:nvPr/>
         </p:nvCxnSpPr>
@@ -30015,7 +30061,7 @@
       </p:cxnSp>
       <p:cxnSp>
         <p:nvCxnSpPr>
-          <p:cNvPr id="575" name="Connector 13"/>
+          <p:cNvPr id="576" name="Connector 13"/>
           <p:cNvCxnSpPr/>
           <p:nvPr/>
         </p:nvCxnSpPr>
@@ -30037,7 +30083,7 @@
       </p:cxnSp>
       <p:cxnSp>
         <p:nvCxnSpPr>
-          <p:cNvPr id="576" name="Connector 14"/>
+          <p:cNvPr id="577" name="Connector 14"/>
           <p:cNvCxnSpPr/>
           <p:nvPr/>
         </p:nvCxnSpPr>
@@ -30059,7 +30105,7 @@
       </p:cxnSp>
       <p:sp>
         <p:nvSpPr>
-          <p:cNvPr id="577" name="Oval 15"/>
+          <p:cNvPr id="578" name="Oval 15"/>
           <p:cNvSpPr/>
           <p:nvPr/>
         </p:nvSpPr>
@@ -30101,7 +30147,7 @@
           <a:fontRef idx="minor"/>
         </p:style>
         <p:txBody>
-          <a:bodyPr lIns="90000" rIns="90000" tIns="45000" bIns="45000" anchor="ctr">
+          <a:bodyPr wrap="none" lIns="0" rIns="0" tIns="0" bIns="0" anchor="ctr">
             <a:noAutofit/>
           </a:bodyPr>
           <a:p>
@@ -30134,7 +30180,7 @@
       </p:sp>
       <p:sp>
         <p:nvSpPr>
-          <p:cNvPr id="578" name="Oval 16"/>
+          <p:cNvPr id="579" name="Oval 16"/>
           <p:cNvSpPr/>
           <p:nvPr/>
         </p:nvSpPr>
@@ -30176,7 +30222,7 @@
           <a:fontRef idx="minor"/>
         </p:style>
         <p:txBody>
-          <a:bodyPr lIns="90000" rIns="90000" tIns="45000" bIns="45000" anchor="ctr">
+          <a:bodyPr wrap="none" lIns="0" rIns="0" tIns="0" bIns="0" anchor="ctr">
             <a:noAutofit/>
           </a:bodyPr>
           <a:p>
@@ -30209,7 +30255,7 @@
       </p:sp>
       <p:sp>
         <p:nvSpPr>
-          <p:cNvPr id="579" name="Oval 17"/>
+          <p:cNvPr id="580" name="Oval 17"/>
           <p:cNvSpPr/>
           <p:nvPr/>
         </p:nvSpPr>
@@ -30251,7 +30297,7 @@
           <a:fontRef idx="minor"/>
         </p:style>
         <p:txBody>
-          <a:bodyPr lIns="90000" rIns="90000" tIns="45000" bIns="45000" anchor="ctr">
+          <a:bodyPr wrap="none" lIns="0" rIns="0" tIns="0" bIns="0" anchor="ctr">
             <a:noAutofit/>
           </a:bodyPr>
           <a:p>
@@ -30284,7 +30330,7 @@
       </p:sp>
       <p:sp>
         <p:nvSpPr>
-          <p:cNvPr id="580" name="Oval 18"/>
+          <p:cNvPr id="581" name="Oval 18"/>
           <p:cNvSpPr/>
           <p:nvPr/>
         </p:nvSpPr>
@@ -30326,7 +30372,7 @@
           <a:fontRef idx="minor"/>
         </p:style>
         <p:txBody>
-          <a:bodyPr lIns="90000" rIns="90000" tIns="45000" bIns="45000" anchor="ctr">
+          <a:bodyPr wrap="none" lIns="0" rIns="0" tIns="0" bIns="0" anchor="ctr">
             <a:noAutofit/>
           </a:bodyPr>
           <a:p>
@@ -30359,7 +30405,7 @@
       </p:sp>
       <p:sp>
         <p:nvSpPr>
-          <p:cNvPr id="581" name="Oval 19"/>
+          <p:cNvPr id="582" name="Oval 19"/>
           <p:cNvSpPr/>
           <p:nvPr/>
         </p:nvSpPr>
@@ -30401,7 +30447,7 @@
           <a:fontRef idx="minor"/>
         </p:style>
         <p:txBody>
-          <a:bodyPr lIns="90000" rIns="90000" tIns="45000" bIns="45000" anchor="ctr">
+          <a:bodyPr wrap="none" lIns="0" rIns="0" tIns="0" bIns="0" anchor="ctr">
             <a:noAutofit/>
           </a:bodyPr>
           <a:p>
@@ -30434,7 +30480,7 @@
       </p:sp>
       <p:sp>
         <p:nvSpPr>
-          <p:cNvPr id="582" name="Oval 20"/>
+          <p:cNvPr id="583" name="Oval 20"/>
           <p:cNvSpPr/>
           <p:nvPr/>
         </p:nvSpPr>
@@ -30476,7 +30522,7 @@
           <a:fontRef idx="minor"/>
         </p:style>
         <p:txBody>
-          <a:bodyPr lIns="90000" rIns="90000" tIns="45000" bIns="45000" anchor="ctr">
+          <a:bodyPr wrap="none" lIns="0" rIns="0" tIns="0" bIns="0" anchor="ctr">
             <a:noAutofit/>
           </a:bodyPr>
           <a:p>
@@ -30509,7 +30555,7 @@
       </p:sp>
       <p:sp>
         <p:nvSpPr>
-          <p:cNvPr id="583" name="TextBox 21"/>
+          <p:cNvPr id="584" name="TextBox 21"/>
           <p:cNvSpPr/>
           <p:nvPr/>
         </p:nvSpPr>
@@ -30566,7 +30612,7 @@
       </p:sp>
       <p:cxnSp>
         <p:nvCxnSpPr>
-          <p:cNvPr id="584" name="Connector 22"/>
+          <p:cNvPr id="585" name="Connector 22"/>
           <p:cNvCxnSpPr/>
           <p:nvPr/>
         </p:nvCxnSpPr>
@@ -30588,7 +30634,7 @@
       </p:cxnSp>
       <p:cxnSp>
         <p:nvCxnSpPr>
-          <p:cNvPr id="585" name="Connector 23"/>
+          <p:cNvPr id="586" name="Connector 23"/>
           <p:cNvCxnSpPr/>
           <p:nvPr/>
         </p:nvCxnSpPr>
@@ -30610,7 +30656,7 @@
       </p:cxnSp>
       <p:cxnSp>
         <p:nvCxnSpPr>
-          <p:cNvPr id="586" name="Connector 24"/>
+          <p:cNvPr id="587" name="Connector 24"/>
           <p:cNvCxnSpPr/>
           <p:nvPr/>
         </p:nvCxnSpPr>
@@ -30632,7 +30678,7 @@
       </p:cxnSp>
       <p:cxnSp>
         <p:nvCxnSpPr>
-          <p:cNvPr id="587" name="Connector 25"/>
+          <p:cNvPr id="588" name="Connector 25"/>
           <p:cNvCxnSpPr/>
           <p:nvPr/>
         </p:nvCxnSpPr>
@@ -30654,7 +30700,7 @@
       </p:cxnSp>
       <p:sp>
         <p:nvSpPr>
-          <p:cNvPr id="588" name="Oval 26"/>
+          <p:cNvPr id="589" name="Oval 26"/>
           <p:cNvSpPr/>
           <p:nvPr/>
         </p:nvSpPr>
@@ -30696,7 +30742,7 @@
           <a:fontRef idx="minor"/>
         </p:style>
         <p:txBody>
-          <a:bodyPr lIns="90000" rIns="90000" tIns="45000" bIns="45000" anchor="ctr">
+          <a:bodyPr wrap="none" lIns="0" rIns="0" tIns="0" bIns="0" anchor="ctr">
             <a:noAutofit/>
           </a:bodyPr>
           <a:p>
@@ -30729,7 +30775,7 @@
       </p:sp>
       <p:sp>
         <p:nvSpPr>
-          <p:cNvPr id="589" name="Oval 27"/>
+          <p:cNvPr id="590" name="Oval 27"/>
           <p:cNvSpPr/>
           <p:nvPr/>
         </p:nvSpPr>
@@ -30771,7 +30817,7 @@
           <a:fontRef idx="minor"/>
         </p:style>
         <p:txBody>
-          <a:bodyPr lIns="90000" rIns="90000" tIns="45000" bIns="45000" anchor="ctr">
+          <a:bodyPr wrap="none" lIns="0" rIns="0" tIns="0" bIns="0" anchor="ctr">
             <a:noAutofit/>
           </a:bodyPr>
           <a:p>
@@ -30804,7 +30850,7 @@
       </p:sp>
       <p:sp>
         <p:nvSpPr>
-          <p:cNvPr id="590" name="Oval 28"/>
+          <p:cNvPr id="591" name="Oval 28"/>
           <p:cNvSpPr/>
           <p:nvPr/>
         </p:nvSpPr>
@@ -30846,7 +30892,7 @@
           <a:fontRef idx="minor"/>
         </p:style>
         <p:txBody>
-          <a:bodyPr lIns="90000" rIns="90000" tIns="45000" bIns="45000" anchor="ctr">
+          <a:bodyPr wrap="none" lIns="0" rIns="0" tIns="0" bIns="0" anchor="ctr">
             <a:noAutofit/>
           </a:bodyPr>
           <a:p>
@@ -30879,7 +30925,7 @@
       </p:sp>
       <p:sp>
         <p:nvSpPr>
-          <p:cNvPr id="591" name="Oval 29"/>
+          <p:cNvPr id="592" name="Oval 29"/>
           <p:cNvSpPr/>
           <p:nvPr/>
         </p:nvSpPr>
@@ -30921,7 +30967,7 @@
           <a:fontRef idx="minor"/>
         </p:style>
         <p:txBody>
-          <a:bodyPr lIns="90000" rIns="90000" tIns="45000" bIns="45000" anchor="ctr">
+          <a:bodyPr wrap="none" lIns="0" rIns="0" tIns="0" bIns="0" anchor="ctr">
             <a:noAutofit/>
           </a:bodyPr>
           <a:p>
@@ -30954,7 +31000,7 @@
       </p:sp>
       <p:sp>
         <p:nvSpPr>
-          <p:cNvPr id="592" name="Oval 30"/>
+          <p:cNvPr id="593" name="Oval 30"/>
           <p:cNvSpPr/>
           <p:nvPr/>
         </p:nvSpPr>
@@ -30996,7 +31042,7 @@
           <a:fontRef idx="minor"/>
         </p:style>
         <p:txBody>
-          <a:bodyPr lIns="90000" rIns="90000" tIns="45000" bIns="45000" anchor="ctr">
+          <a:bodyPr wrap="none" lIns="0" rIns="0" tIns="0" bIns="0" anchor="ctr">
             <a:noAutofit/>
           </a:bodyPr>
           <a:p>
@@ -31029,7 +31075,7 @@
       </p:sp>
       <p:sp>
         <p:nvSpPr>
-          <p:cNvPr id="593" name="Oval 31"/>
+          <p:cNvPr id="594" name="Oval 31"/>
           <p:cNvSpPr/>
           <p:nvPr/>
         </p:nvSpPr>
@@ -31071,7 +31117,7 @@
           <a:fontRef idx="minor"/>
         </p:style>
         <p:txBody>
-          <a:bodyPr lIns="90000" rIns="90000" tIns="45000" bIns="45000" anchor="ctr">
+          <a:bodyPr wrap="none" lIns="0" rIns="0" tIns="0" bIns="0" anchor="ctr">
             <a:noAutofit/>
           </a:bodyPr>
           <a:p>
@@ -31104,7 +31150,7 @@
       </p:sp>
       <p:sp>
         <p:nvSpPr>
-          <p:cNvPr id="594" name="TextBox 32"/>
+          <p:cNvPr id="595" name="TextBox 32"/>
           <p:cNvSpPr/>
           <p:nvPr/>
         </p:nvSpPr>
@@ -31191,7 +31237,7 @@
       </p:grpSpPr>
       <p:sp>
         <p:nvSpPr>
-          <p:cNvPr id="595" name="TextBox 1"/>
+          <p:cNvPr id="596" name="TextBox 1"/>
           <p:cNvSpPr/>
           <p:nvPr/>
         </p:nvSpPr>
@@ -31248,7 +31294,7 @@
       </p:sp>
       <p:sp>
         <p:nvSpPr>
-          <p:cNvPr id="596" name="TextBox 2"/>
+          <p:cNvPr id="597" name="TextBox 2"/>
           <p:cNvSpPr/>
           <p:nvPr/>
         </p:nvSpPr>
@@ -31305,7 +31351,7 @@
       </p:sp>
       <p:cxnSp>
         <p:nvCxnSpPr>
-          <p:cNvPr id="597" name="Connector 3"/>
+          <p:cNvPr id="598" name="Connector 3"/>
           <p:cNvCxnSpPr/>
           <p:nvPr/>
         </p:nvCxnSpPr>
@@ -31327,7 +31373,7 @@
       </p:cxnSp>
       <p:sp>
         <p:nvSpPr>
-          <p:cNvPr id="598" name="TextBox 4"/>
+          <p:cNvPr id="599" name="TextBox 4"/>
           <p:cNvSpPr/>
           <p:nvPr/>
         </p:nvSpPr>
@@ -31384,7 +31430,7 @@
       </p:sp>
       <p:sp>
         <p:nvSpPr>
-          <p:cNvPr id="599" name="TextBox 5"/>
+          <p:cNvPr id="600" name="TextBox 5"/>
           <p:cNvSpPr/>
           <p:nvPr/>
         </p:nvSpPr>
@@ -31441,7 +31487,7 @@
       </p:sp>
       <p:sp>
         <p:nvSpPr>
-          <p:cNvPr id="600" name="Rectangle 6"/>
+          <p:cNvPr id="601" name="Rectangle 6"/>
           <p:cNvSpPr/>
           <p:nvPr/>
         </p:nvSpPr>
@@ -31502,7 +31548,7 @@
       </p:sp>
       <p:sp>
         <p:nvSpPr>
-          <p:cNvPr id="601" name="TextBox 7"/>
+          <p:cNvPr id="602" name="TextBox 7"/>
           <p:cNvSpPr/>
           <p:nvPr/>
         </p:nvSpPr>
@@ -31770,7 +31816,7 @@
       </p:grpSpPr>
       <p:sp>
         <p:nvSpPr>
-          <p:cNvPr id="602" name="TextBox 1"/>
+          <p:cNvPr id="603" name="TextBox 1"/>
           <p:cNvSpPr/>
           <p:nvPr/>
         </p:nvSpPr>
@@ -31827,7 +31873,7 @@
       </p:sp>
       <p:sp>
         <p:nvSpPr>
-          <p:cNvPr id="603" name="TextBox 2"/>
+          <p:cNvPr id="604" name="TextBox 2"/>
           <p:cNvSpPr/>
           <p:nvPr/>
         </p:nvSpPr>
@@ -31884,7 +31930,7 @@
       </p:sp>
       <p:cxnSp>
         <p:nvCxnSpPr>
-          <p:cNvPr id="604" name="Connector 3"/>
+          <p:cNvPr id="605" name="Connector 3"/>
           <p:cNvCxnSpPr/>
           <p:nvPr/>
         </p:nvCxnSpPr>
@@ -31906,7 +31952,7 @@
       </p:cxnSp>
       <p:sp>
         <p:nvSpPr>
-          <p:cNvPr id="605" name="TextBox 4"/>
+          <p:cNvPr id="606" name="TextBox 4"/>
           <p:cNvSpPr/>
           <p:nvPr/>
         </p:nvSpPr>
@@ -31963,7 +32009,7 @@
       </p:sp>
       <p:sp>
         <p:nvSpPr>
-          <p:cNvPr id="606" name="TextBox 5"/>
+          <p:cNvPr id="607" name="TextBox 5"/>
           <p:cNvSpPr/>
           <p:nvPr/>
         </p:nvSpPr>
@@ -32020,7 +32066,7 @@
       </p:sp>
       <p:sp>
         <p:nvSpPr>
-          <p:cNvPr id="607" name="Rectangle 6"/>
+          <p:cNvPr id="608" name="Rectangle 6"/>
           <p:cNvSpPr/>
           <p:nvPr/>
         </p:nvSpPr>
@@ -32081,7 +32127,7 @@
       </p:sp>
       <p:graphicFrame>
         <p:nvGraphicFramePr>
-          <p:cNvPr id="608" name="Table 7"/>
+          <p:cNvPr id="609" name="Table 7"/>
           <p:cNvGraphicFramePr/>
           <p:nvPr/>
         </p:nvGraphicFramePr>
@@ -33496,7 +33542,7 @@
       </p:grpSpPr>
       <p:sp>
         <p:nvSpPr>
-          <p:cNvPr id="609" name="TextBox 1"/>
+          <p:cNvPr id="610" name="TextBox 1"/>
           <p:cNvSpPr/>
           <p:nvPr/>
         </p:nvSpPr>
@@ -33553,7 +33599,7 @@
       </p:sp>
       <p:sp>
         <p:nvSpPr>
-          <p:cNvPr id="610" name="TextBox 2"/>
+          <p:cNvPr id="611" name="TextBox 2"/>
           <p:cNvSpPr/>
           <p:nvPr/>
         </p:nvSpPr>
@@ -33610,7 +33656,7 @@
       </p:sp>
       <p:cxnSp>
         <p:nvCxnSpPr>
-          <p:cNvPr id="611" name="Connector 3"/>
+          <p:cNvPr id="612" name="Connector 3"/>
           <p:cNvCxnSpPr/>
           <p:nvPr/>
         </p:nvCxnSpPr>
@@ -33632,7 +33678,7 @@
       </p:cxnSp>
       <p:sp>
         <p:nvSpPr>
-          <p:cNvPr id="612" name="TextBox 4"/>
+          <p:cNvPr id="613" name="TextBox 4"/>
           <p:cNvSpPr/>
           <p:nvPr/>
         </p:nvSpPr>
@@ -33689,7 +33735,7 @@
       </p:sp>
       <p:sp>
         <p:nvSpPr>
-          <p:cNvPr id="613" name="TextBox 5"/>
+          <p:cNvPr id="614" name="TextBox 5"/>
           <p:cNvSpPr/>
           <p:nvPr/>
         </p:nvSpPr>
@@ -33746,7 +33792,7 @@
       </p:sp>
       <p:sp>
         <p:nvSpPr>
-          <p:cNvPr id="614" name="Rectangle 6"/>
+          <p:cNvPr id="615" name="Rectangle 6"/>
           <p:cNvSpPr/>
           <p:nvPr/>
         </p:nvSpPr>
@@ -33807,7 +33853,7 @@
       </p:sp>
       <p:sp>
         <p:nvSpPr>
-          <p:cNvPr id="615" name="TextBox 7"/>
+          <p:cNvPr id="616" name="TextBox 7"/>
           <p:cNvSpPr/>
           <p:nvPr/>
         </p:nvSpPr>
@@ -33958,7 +34004,7 @@
       </p:sp>
       <p:pic>
         <p:nvPicPr>
-          <p:cNvPr id="616" name="Picture 8" descr="l02_cosine.png"/>
+          <p:cNvPr id="617" name="Picture 8" descr="l02_cosine.png"/>
           <p:cNvPicPr/>
           <p:nvPr/>
         </p:nvPicPr>
@@ -34012,7 +34058,7 @@
       </p:grpSpPr>
       <p:sp>
         <p:nvSpPr>
-          <p:cNvPr id="617" name="TextBox 1"/>
+          <p:cNvPr id="618" name="TextBox 1"/>
           <p:cNvSpPr/>
           <p:nvPr/>
         </p:nvSpPr>
@@ -34069,7 +34115,7 @@
       </p:sp>
       <p:sp>
         <p:nvSpPr>
-          <p:cNvPr id="618" name="TextBox 2"/>
+          <p:cNvPr id="619" name="TextBox 2"/>
           <p:cNvSpPr/>
           <p:nvPr/>
         </p:nvSpPr>
@@ -34126,7 +34172,7 @@
       </p:sp>
       <p:cxnSp>
         <p:nvCxnSpPr>
-          <p:cNvPr id="619" name="Connector 3"/>
+          <p:cNvPr id="620" name="Connector 3"/>
           <p:cNvCxnSpPr/>
           <p:nvPr/>
         </p:nvCxnSpPr>
@@ -34148,7 +34194,7 @@
       </p:cxnSp>
       <p:sp>
         <p:nvSpPr>
-          <p:cNvPr id="620" name="TextBox 4"/>
+          <p:cNvPr id="621" name="TextBox 4"/>
           <p:cNvSpPr/>
           <p:nvPr/>
         </p:nvSpPr>
@@ -34205,7 +34251,7 @@
       </p:sp>
       <p:sp>
         <p:nvSpPr>
-          <p:cNvPr id="621" name="TextBox 5"/>
+          <p:cNvPr id="622" name="TextBox 5"/>
           <p:cNvSpPr/>
           <p:nvPr/>
         </p:nvSpPr>
@@ -34262,7 +34308,7 @@
       </p:sp>
       <p:sp>
         <p:nvSpPr>
-          <p:cNvPr id="622" name="Rectangle 6"/>
+          <p:cNvPr id="623" name="Rectangle 6"/>
           <p:cNvSpPr/>
           <p:nvPr/>
         </p:nvSpPr>
@@ -34323,7 +34369,7 @@
       </p:sp>
       <p:graphicFrame>
         <p:nvGraphicFramePr>
-          <p:cNvPr id="623" name="Table 7"/>
+          <p:cNvPr id="624" name="Table 7"/>
           <p:cNvGraphicFramePr/>
           <p:nvPr/>
         </p:nvGraphicFramePr>
@@ -35347,7 +35393,7 @@
       </p:graphicFrame>
       <p:sp>
         <p:nvSpPr>
-          <p:cNvPr id="624" name="TextBox 8"/>
+          <p:cNvPr id="625" name="TextBox 8"/>
           <p:cNvSpPr/>
           <p:nvPr/>
         </p:nvSpPr>
@@ -35434,7 +35480,7 @@
       </p:grpSpPr>
       <p:sp>
         <p:nvSpPr>
-          <p:cNvPr id="625" name="TextBox 1"/>
+          <p:cNvPr id="626" name="TextBox 1"/>
           <p:cNvSpPr/>
           <p:nvPr/>
         </p:nvSpPr>
@@ -35491,7 +35537,7 @@
       </p:sp>
       <p:sp>
         <p:nvSpPr>
-          <p:cNvPr id="626" name="TextBox 2"/>
+          <p:cNvPr id="627" name="TextBox 2"/>
           <p:cNvSpPr/>
           <p:nvPr/>
         </p:nvSpPr>
@@ -35548,7 +35594,7 @@
       </p:sp>
       <p:cxnSp>
         <p:nvCxnSpPr>
-          <p:cNvPr id="627" name="Connector 3"/>
+          <p:cNvPr id="628" name="Connector 3"/>
           <p:cNvCxnSpPr/>
           <p:nvPr/>
         </p:nvCxnSpPr>
@@ -35570,7 +35616,7 @@
       </p:cxnSp>
       <p:sp>
         <p:nvSpPr>
-          <p:cNvPr id="628" name="TextBox 4"/>
+          <p:cNvPr id="629" name="TextBox 4"/>
           <p:cNvSpPr/>
           <p:nvPr/>
         </p:nvSpPr>
@@ -35627,7 +35673,7 @@
       </p:sp>
       <p:sp>
         <p:nvSpPr>
-          <p:cNvPr id="629" name="TextBox 5"/>
+          <p:cNvPr id="630" name="TextBox 5"/>
           <p:cNvSpPr/>
           <p:nvPr/>
         </p:nvSpPr>
@@ -35684,7 +35730,7 @@
       </p:sp>
       <p:sp>
         <p:nvSpPr>
-          <p:cNvPr id="630" name="Rectangle 6"/>
+          <p:cNvPr id="631" name="Rectangle 6"/>
           <p:cNvSpPr/>
           <p:nvPr/>
         </p:nvSpPr>
@@ -35745,7 +35791,7 @@
       </p:sp>
       <p:sp>
         <p:nvSpPr>
-          <p:cNvPr id="631" name="TextBox 7"/>
+          <p:cNvPr id="632" name="TextBox 7"/>
           <p:cNvSpPr/>
           <p:nvPr/>
         </p:nvSpPr>
@@ -36012,7 +36058,7 @@
       </p:sp>
       <p:cxnSp>
         <p:nvCxnSpPr>
-          <p:cNvPr id="632" name="Connector 8"/>
+          <p:cNvPr id="633" name="Connector 8"/>
           <p:cNvCxnSpPr/>
           <p:nvPr/>
         </p:nvCxnSpPr>
@@ -36034,7 +36080,7 @@
       </p:cxnSp>
       <p:cxnSp>
         <p:nvCxnSpPr>
-          <p:cNvPr id="633" name="Connector 9"/>
+          <p:cNvPr id="634" name="Connector 9"/>
           <p:cNvCxnSpPr/>
           <p:nvPr/>
         </p:nvCxnSpPr>
@@ -36056,7 +36102,7 @@
       </p:cxnSp>
       <p:cxnSp>
         <p:nvCxnSpPr>
-          <p:cNvPr id="634" name="Connector 10"/>
+          <p:cNvPr id="635" name="Connector 10"/>
           <p:cNvCxnSpPr/>
           <p:nvPr/>
         </p:nvCxnSpPr>
@@ -36078,7 +36124,7 @@
       </p:cxnSp>
       <p:cxnSp>
         <p:nvCxnSpPr>
-          <p:cNvPr id="635" name="Connector 11"/>
+          <p:cNvPr id="636" name="Connector 11"/>
           <p:cNvCxnSpPr/>
           <p:nvPr/>
         </p:nvCxnSpPr>
@@ -36100,7 +36146,7 @@
       </p:cxnSp>
       <p:sp>
         <p:nvSpPr>
-          <p:cNvPr id="636" name="Oval 12"/>
+          <p:cNvPr id="637" name="Oval 12"/>
           <p:cNvSpPr/>
           <p:nvPr/>
         </p:nvSpPr>
@@ -36142,7 +36188,7 @@
           <a:fontRef idx="minor"/>
         </p:style>
         <p:txBody>
-          <a:bodyPr lIns="90000" rIns="90000" tIns="45000" bIns="45000" anchor="ctr">
+          <a:bodyPr wrap="none" lIns="0" rIns="0" tIns="0" bIns="0" anchor="ctr">
             <a:noAutofit/>
           </a:bodyPr>
           <a:p>
@@ -36175,7 +36221,7 @@
       </p:sp>
       <p:sp>
         <p:nvSpPr>
-          <p:cNvPr id="637" name="Oval 13"/>
+          <p:cNvPr id="638" name="Oval 13"/>
           <p:cNvSpPr/>
           <p:nvPr/>
         </p:nvSpPr>
@@ -36217,7 +36263,7 @@
           <a:fontRef idx="minor"/>
         </p:style>
         <p:txBody>
-          <a:bodyPr lIns="90000" rIns="90000" tIns="45000" bIns="45000" anchor="ctr">
+          <a:bodyPr wrap="none" lIns="0" rIns="0" tIns="0" bIns="0" anchor="ctr">
             <a:noAutofit/>
           </a:bodyPr>
           <a:p>
@@ -36250,7 +36296,7 @@
       </p:sp>
       <p:sp>
         <p:nvSpPr>
-          <p:cNvPr id="638" name="Oval 14"/>
+          <p:cNvPr id="639" name="Oval 14"/>
           <p:cNvSpPr/>
           <p:nvPr/>
         </p:nvSpPr>
@@ -36292,7 +36338,7 @@
           <a:fontRef idx="minor"/>
         </p:style>
         <p:txBody>
-          <a:bodyPr lIns="90000" rIns="90000" tIns="45000" bIns="45000" anchor="ctr">
+          <a:bodyPr wrap="none" lIns="0" rIns="0" tIns="0" bIns="0" anchor="ctr">
             <a:noAutofit/>
           </a:bodyPr>
           <a:p>
@@ -36325,7 +36371,7 @@
       </p:sp>
       <p:sp>
         <p:nvSpPr>
-          <p:cNvPr id="639" name="Oval 15"/>
+          <p:cNvPr id="640" name="Oval 15"/>
           <p:cNvSpPr/>
           <p:nvPr/>
         </p:nvSpPr>
@@ -36367,7 +36413,7 @@
           <a:fontRef idx="minor"/>
         </p:style>
         <p:txBody>
-          <a:bodyPr lIns="90000" rIns="90000" tIns="45000" bIns="45000" anchor="ctr">
+          <a:bodyPr wrap="none" lIns="0" rIns="0" tIns="0" bIns="0" anchor="ctr">
             <a:noAutofit/>
           </a:bodyPr>
           <a:p>
@@ -36400,7 +36446,7 @@
       </p:sp>
       <p:sp>
         <p:nvSpPr>
-          <p:cNvPr id="640" name="Oval 16"/>
+          <p:cNvPr id="641" name="Oval 16"/>
           <p:cNvSpPr/>
           <p:nvPr/>
         </p:nvSpPr>
@@ -36442,7 +36488,7 @@
           <a:fontRef idx="minor"/>
         </p:style>
         <p:txBody>
-          <a:bodyPr lIns="90000" rIns="90000" tIns="45000" bIns="45000" anchor="ctr">
+          <a:bodyPr wrap="none" lIns="0" rIns="0" tIns="0" bIns="0" anchor="ctr">
             <a:noAutofit/>
           </a:bodyPr>
           <a:p>
@@ -36505,7 +36551,7 @@
       </p:grpSpPr>
       <p:sp>
         <p:nvSpPr>
-          <p:cNvPr id="641" name="TextBox 1"/>
+          <p:cNvPr id="642" name="TextBox 1"/>
           <p:cNvSpPr/>
           <p:nvPr/>
         </p:nvSpPr>
@@ -36562,7 +36608,7 @@
       </p:sp>
       <p:sp>
         <p:nvSpPr>
-          <p:cNvPr id="642" name="TextBox 2"/>
+          <p:cNvPr id="643" name="TextBox 2"/>
           <p:cNvSpPr/>
           <p:nvPr/>
         </p:nvSpPr>
@@ -36619,7 +36665,7 @@
       </p:sp>
       <p:cxnSp>
         <p:nvCxnSpPr>
-          <p:cNvPr id="643" name="Connector 3"/>
+          <p:cNvPr id="644" name="Connector 3"/>
           <p:cNvCxnSpPr/>
           <p:nvPr/>
         </p:nvCxnSpPr>
@@ -36641,7 +36687,7 @@
       </p:cxnSp>
       <p:sp>
         <p:nvSpPr>
-          <p:cNvPr id="644" name="TextBox 4"/>
+          <p:cNvPr id="645" name="TextBox 4"/>
           <p:cNvSpPr/>
           <p:nvPr/>
         </p:nvSpPr>
@@ -36698,7 +36744,7 @@
       </p:sp>
       <p:sp>
         <p:nvSpPr>
-          <p:cNvPr id="645" name="TextBox 5"/>
+          <p:cNvPr id="646" name="TextBox 5"/>
           <p:cNvSpPr/>
           <p:nvPr/>
         </p:nvSpPr>
@@ -36755,7 +36801,7 @@
       </p:sp>
       <p:sp>
         <p:nvSpPr>
-          <p:cNvPr id="646" name="Rectangle 6"/>
+          <p:cNvPr id="647" name="Rectangle 6"/>
           <p:cNvSpPr/>
           <p:nvPr/>
         </p:nvSpPr>
@@ -36816,7 +36862,7 @@
       </p:sp>
       <p:sp>
         <p:nvSpPr>
-          <p:cNvPr id="647" name="TextBox 7"/>
+          <p:cNvPr id="648" name="TextBox 7"/>
           <p:cNvSpPr/>
           <p:nvPr/>
         </p:nvSpPr>
@@ -36957,7 +37003,7 @@
       </p:grpSpPr>
       <p:sp>
         <p:nvSpPr>
-          <p:cNvPr id="648" name="Rectangle 1"/>
+          <p:cNvPr id="649" name="Rectangle 1"/>
           <p:cNvSpPr/>
           <p:nvPr/>
         </p:nvSpPr>
@@ -37018,7 +37064,7 @@
       </p:sp>
       <p:sp>
         <p:nvSpPr>
-          <p:cNvPr id="649" name="TextBox 2"/>
+          <p:cNvPr id="650" name="TextBox 2"/>
           <p:cNvSpPr/>
           <p:nvPr/>
         </p:nvSpPr>
@@ -37075,7 +37121,7 @@
       </p:sp>
       <p:sp>
         <p:nvSpPr>
-          <p:cNvPr id="650" name="TextBox 3"/>
+          <p:cNvPr id="651" name="TextBox 3"/>
           <p:cNvSpPr/>
           <p:nvPr/>
         </p:nvSpPr>
@@ -37162,7 +37208,7 @@
       </p:grpSpPr>
       <p:sp>
         <p:nvSpPr>
-          <p:cNvPr id="651" name="TextBox 1"/>
+          <p:cNvPr id="652" name="TextBox 1"/>
           <p:cNvSpPr/>
           <p:nvPr/>
         </p:nvSpPr>
@@ -37219,7 +37265,7 @@
       </p:sp>
       <p:sp>
         <p:nvSpPr>
-          <p:cNvPr id="652" name="TextBox 2"/>
+          <p:cNvPr id="653" name="TextBox 2"/>
           <p:cNvSpPr/>
           <p:nvPr/>
         </p:nvSpPr>
@@ -37276,7 +37322,7 @@
       </p:sp>
       <p:cxnSp>
         <p:nvCxnSpPr>
-          <p:cNvPr id="653" name="Connector 3"/>
+          <p:cNvPr id="654" name="Connector 3"/>
           <p:cNvCxnSpPr/>
           <p:nvPr/>
         </p:nvCxnSpPr>
@@ -37298,7 +37344,7 @@
       </p:cxnSp>
       <p:sp>
         <p:nvSpPr>
-          <p:cNvPr id="654" name="TextBox 4"/>
+          <p:cNvPr id="655" name="TextBox 4"/>
           <p:cNvSpPr/>
           <p:nvPr/>
         </p:nvSpPr>
@@ -37355,7 +37401,7 @@
       </p:sp>
       <p:sp>
         <p:nvSpPr>
-          <p:cNvPr id="655" name="TextBox 5"/>
+          <p:cNvPr id="656" name="TextBox 5"/>
           <p:cNvSpPr/>
           <p:nvPr/>
         </p:nvSpPr>
@@ -37412,7 +37458,7 @@
       </p:sp>
       <p:sp>
         <p:nvSpPr>
-          <p:cNvPr id="656" name="Rectangle 6"/>
+          <p:cNvPr id="657" name="Rectangle 6"/>
           <p:cNvSpPr/>
           <p:nvPr/>
         </p:nvSpPr>
@@ -37473,7 +37519,7 @@
       </p:sp>
       <p:sp>
         <p:nvSpPr>
-          <p:cNvPr id="657" name="TextBox 7"/>
+          <p:cNvPr id="658" name="TextBox 7"/>
           <p:cNvSpPr/>
           <p:nvPr/>
         </p:nvSpPr>
@@ -37722,7 +37768,7 @@
       </p:sp>
       <p:cxnSp>
         <p:nvCxnSpPr>
-          <p:cNvPr id="658" name="Connector 8"/>
+          <p:cNvPr id="659" name="Connector 8"/>
           <p:cNvCxnSpPr/>
           <p:nvPr/>
         </p:nvCxnSpPr>
@@ -37744,7 +37790,7 @@
       </p:cxnSp>
       <p:cxnSp>
         <p:nvCxnSpPr>
-          <p:cNvPr id="659" name="Connector 9"/>
+          <p:cNvPr id="660" name="Connector 9"/>
           <p:cNvCxnSpPr/>
           <p:nvPr/>
         </p:nvCxnSpPr>
@@ -37766,7 +37812,7 @@
       </p:cxnSp>
       <p:cxnSp>
         <p:nvCxnSpPr>
-          <p:cNvPr id="660" name="Connector 10"/>
+          <p:cNvPr id="661" name="Connector 10"/>
           <p:cNvCxnSpPr/>
           <p:nvPr/>
         </p:nvCxnSpPr>
@@ -37788,7 +37834,7 @@
       </p:cxnSp>
       <p:cxnSp>
         <p:nvCxnSpPr>
-          <p:cNvPr id="661" name="Connector 11"/>
+          <p:cNvPr id="662" name="Connector 11"/>
           <p:cNvCxnSpPr/>
           <p:nvPr/>
         </p:nvCxnSpPr>
@@ -37810,7 +37856,7 @@
       </p:cxnSp>
       <p:cxnSp>
         <p:nvCxnSpPr>
-          <p:cNvPr id="662" name="Connector 12"/>
+          <p:cNvPr id="663" name="Connector 12"/>
           <p:cNvCxnSpPr/>
           <p:nvPr/>
         </p:nvCxnSpPr>
@@ -37832,7 +37878,7 @@
       </p:cxnSp>
       <p:sp>
         <p:nvSpPr>
-          <p:cNvPr id="663" name="Oval 13"/>
+          <p:cNvPr id="664" name="Oval 13"/>
           <p:cNvSpPr/>
           <p:nvPr/>
         </p:nvSpPr>
@@ -37896,7 +37942,7 @@
       </p:sp>
       <p:sp>
         <p:nvSpPr>
-          <p:cNvPr id="664" name="Oval 14"/>
+          <p:cNvPr id="665" name="Oval 14"/>
           <p:cNvSpPr/>
           <p:nvPr/>
         </p:nvSpPr>
@@ -37960,7 +38006,7 @@
       </p:sp>
       <p:sp>
         <p:nvSpPr>
-          <p:cNvPr id="665" name="Oval 15"/>
+          <p:cNvPr id="666" name="Oval 15"/>
           <p:cNvSpPr/>
           <p:nvPr/>
         </p:nvSpPr>
@@ -38024,7 +38070,7 @@
       </p:sp>
       <p:sp>
         <p:nvSpPr>
-          <p:cNvPr id="666" name="Oval 16"/>
+          <p:cNvPr id="667" name="Oval 16"/>
           <p:cNvSpPr/>
           <p:nvPr/>
         </p:nvSpPr>
@@ -38088,7 +38134,7 @@
       </p:sp>
       <p:sp>
         <p:nvSpPr>
-          <p:cNvPr id="667" name="Oval 17"/>
+          <p:cNvPr id="668" name="Oval 17"/>
           <p:cNvSpPr/>
           <p:nvPr/>
         </p:nvSpPr>
@@ -38130,7 +38176,7 @@
           <a:fontRef idx="minor"/>
         </p:style>
         <p:txBody>
-          <a:bodyPr lIns="90000" rIns="90000" tIns="45000" bIns="45000" anchor="ctr">
+          <a:bodyPr wrap="none" lIns="0" rIns="0" tIns="0" bIns="0" anchor="ctr">
             <a:noAutofit/>
           </a:bodyPr>
           <a:p>
@@ -38163,7 +38209,7 @@
       </p:sp>
       <p:sp>
         <p:nvSpPr>
-          <p:cNvPr id="668" name="TextBox 18"/>
+          <p:cNvPr id="669" name="TextBox 18"/>
           <p:cNvSpPr/>
           <p:nvPr/>
         </p:nvSpPr>
@@ -38250,7 +38296,7 @@
       </p:grpSpPr>
       <p:sp>
         <p:nvSpPr>
-          <p:cNvPr id="669" name="TextBox 1"/>
+          <p:cNvPr id="670" name="TextBox 1"/>
           <p:cNvSpPr/>
           <p:nvPr/>
         </p:nvSpPr>
@@ -38307,7 +38353,7 @@
       </p:sp>
       <p:sp>
         <p:nvSpPr>
-          <p:cNvPr id="670" name="TextBox 2"/>
+          <p:cNvPr id="671" name="TextBox 2"/>
           <p:cNvSpPr/>
           <p:nvPr/>
         </p:nvSpPr>
@@ -38364,7 +38410,7 @@
       </p:sp>
       <p:cxnSp>
         <p:nvCxnSpPr>
-          <p:cNvPr id="671" name="Connector 3"/>
+          <p:cNvPr id="672" name="Connector 3"/>
           <p:cNvCxnSpPr/>
           <p:nvPr/>
         </p:nvCxnSpPr>
@@ -38386,7 +38432,7 @@
       </p:cxnSp>
       <p:sp>
         <p:nvSpPr>
-          <p:cNvPr id="672" name="TextBox 4"/>
+          <p:cNvPr id="673" name="TextBox 4"/>
           <p:cNvSpPr/>
           <p:nvPr/>
         </p:nvSpPr>
@@ -38443,7 +38489,7 @@
       </p:sp>
       <p:sp>
         <p:nvSpPr>
-          <p:cNvPr id="673" name="TextBox 5"/>
+          <p:cNvPr id="674" name="TextBox 5"/>
           <p:cNvSpPr/>
           <p:nvPr/>
         </p:nvSpPr>
@@ -38500,7 +38546,7 @@
       </p:sp>
       <p:sp>
         <p:nvSpPr>
-          <p:cNvPr id="674" name="Rectangle 6"/>
+          <p:cNvPr id="675" name="Rectangle 6"/>
           <p:cNvSpPr/>
           <p:nvPr/>
         </p:nvSpPr>
@@ -38561,7 +38607,7 @@
       </p:sp>
       <p:graphicFrame>
         <p:nvGraphicFramePr>
-          <p:cNvPr id="675" name="Table 7"/>
+          <p:cNvPr id="676" name="Table 7"/>
           <p:cNvGraphicFramePr/>
           <p:nvPr/>
         </p:nvGraphicFramePr>
@@ -39524,7 +39570,7 @@
       </p:graphicFrame>
       <p:sp>
         <p:nvSpPr>
-          <p:cNvPr id="676" name="TextBox 8"/>
+          <p:cNvPr id="677" name="TextBox 8"/>
           <p:cNvSpPr/>
           <p:nvPr/>
         </p:nvSpPr>
@@ -39611,7 +39657,7 @@
       </p:grpSpPr>
       <p:sp>
         <p:nvSpPr>
-          <p:cNvPr id="677" name="TextBox 1"/>
+          <p:cNvPr id="678" name="TextBox 1"/>
           <p:cNvSpPr/>
           <p:nvPr/>
         </p:nvSpPr>
@@ -39668,7 +39714,7 @@
       </p:sp>
       <p:sp>
         <p:nvSpPr>
-          <p:cNvPr id="678" name="TextBox 2"/>
+          <p:cNvPr id="679" name="TextBox 2"/>
           <p:cNvSpPr/>
           <p:nvPr/>
         </p:nvSpPr>
@@ -39725,7 +39771,7 @@
       </p:sp>
       <p:cxnSp>
         <p:nvCxnSpPr>
-          <p:cNvPr id="679" name="Connector 3"/>
+          <p:cNvPr id="680" name="Connector 3"/>
           <p:cNvCxnSpPr/>
           <p:nvPr/>
         </p:nvCxnSpPr>
@@ -39747,7 +39793,7 @@
       </p:cxnSp>
       <p:sp>
         <p:nvSpPr>
-          <p:cNvPr id="680" name="TextBox 4"/>
+          <p:cNvPr id="681" name="TextBox 4"/>
           <p:cNvSpPr/>
           <p:nvPr/>
         </p:nvSpPr>
@@ -39804,7 +39850,7 @@
       </p:sp>
       <p:sp>
         <p:nvSpPr>
-          <p:cNvPr id="681" name="TextBox 5"/>
+          <p:cNvPr id="682" name="TextBox 5"/>
           <p:cNvSpPr/>
           <p:nvPr/>
         </p:nvSpPr>
@@ -39861,7 +39907,7 @@
       </p:sp>
       <p:sp>
         <p:nvSpPr>
-          <p:cNvPr id="682" name="Rectangle 6"/>
+          <p:cNvPr id="683" name="Rectangle 6"/>
           <p:cNvSpPr/>
           <p:nvPr/>
         </p:nvSpPr>
@@ -39922,7 +39968,7 @@
       </p:sp>
       <p:graphicFrame>
         <p:nvGraphicFramePr>
-          <p:cNvPr id="683" name="Table 7"/>
+          <p:cNvPr id="684" name="Table 7"/>
           <p:cNvGraphicFramePr/>
           <p:nvPr/>
         </p:nvGraphicFramePr>
@@ -40604,7 +40650,7 @@
       </p:grpSpPr>
       <p:sp>
         <p:nvSpPr>
-          <p:cNvPr id="684" name="TextBox 1"/>
+          <p:cNvPr id="685" name="TextBox 1"/>
           <p:cNvSpPr/>
           <p:nvPr/>
         </p:nvSpPr>
@@ -40661,7 +40707,7 @@
       </p:sp>
       <p:sp>
         <p:nvSpPr>
-          <p:cNvPr id="685" name="TextBox 2"/>
+          <p:cNvPr id="686" name="TextBox 2"/>
           <p:cNvSpPr/>
           <p:nvPr/>
         </p:nvSpPr>
@@ -40718,7 +40764,7 @@
       </p:sp>
       <p:cxnSp>
         <p:nvCxnSpPr>
-          <p:cNvPr id="686" name="Connector 3"/>
+          <p:cNvPr id="687" name="Connector 3"/>
           <p:cNvCxnSpPr/>
           <p:nvPr/>
         </p:nvCxnSpPr>
@@ -40740,7 +40786,7 @@
       </p:cxnSp>
       <p:sp>
         <p:nvSpPr>
-          <p:cNvPr id="687" name="TextBox 4"/>
+          <p:cNvPr id="688" name="TextBox 4"/>
           <p:cNvSpPr/>
           <p:nvPr/>
         </p:nvSpPr>
@@ -40797,7 +40843,7 @@
       </p:sp>
       <p:sp>
         <p:nvSpPr>
-          <p:cNvPr id="688" name="TextBox 5"/>
+          <p:cNvPr id="689" name="TextBox 5"/>
           <p:cNvSpPr/>
           <p:nvPr/>
         </p:nvSpPr>
@@ -40854,7 +40900,7 @@
       </p:sp>
       <p:sp>
         <p:nvSpPr>
-          <p:cNvPr id="689" name="Rectangle 6"/>
+          <p:cNvPr id="690" name="Rectangle 6"/>
           <p:cNvSpPr/>
           <p:nvPr/>
         </p:nvSpPr>
@@ -40915,7 +40961,7 @@
       </p:sp>
       <p:sp>
         <p:nvSpPr>
-          <p:cNvPr id="690" name="TextBox 7"/>
+          <p:cNvPr id="691" name="TextBox 7"/>
           <p:cNvSpPr/>
           <p:nvPr/>
         </p:nvSpPr>
@@ -40972,7 +41018,7 @@
       </p:sp>
       <p:sp>
         <p:nvSpPr>
-          <p:cNvPr id="691" name="Rounded Rectangle 8"/>
+          <p:cNvPr id="692" name="Rounded Rectangle 8"/>
           <p:cNvSpPr/>
           <p:nvPr/>
         </p:nvSpPr>
@@ -41038,7 +41084,7 @@
       </p:sp>
       <p:sp>
         <p:nvSpPr>
-          <p:cNvPr id="692" name="TextBox 9"/>
+          <p:cNvPr id="693" name="TextBox 9"/>
           <p:cNvSpPr/>
           <p:nvPr/>
         </p:nvSpPr>
@@ -41106,7 +41152,7 @@
       </p:sp>
       <p:sp>
         <p:nvSpPr>
-          <p:cNvPr id="693" name="Rounded Rectangle 10"/>
+          <p:cNvPr id="694" name="Rounded Rectangle 10"/>
           <p:cNvSpPr/>
           <p:nvPr/>
         </p:nvSpPr>
@@ -41172,7 +41218,7 @@
       </p:sp>
       <p:sp>
         <p:nvSpPr>
-          <p:cNvPr id="694" name="TextBox 11"/>
+          <p:cNvPr id="695" name="TextBox 11"/>
           <p:cNvSpPr/>
           <p:nvPr/>
         </p:nvSpPr>
@@ -41240,7 +41286,7 @@
       </p:sp>
       <p:sp>
         <p:nvSpPr>
-          <p:cNvPr id="695" name="Rounded Rectangle 12"/>
+          <p:cNvPr id="696" name="Rounded Rectangle 12"/>
           <p:cNvSpPr/>
           <p:nvPr/>
         </p:nvSpPr>
@@ -41306,7 +41352,7 @@
       </p:sp>
       <p:sp>
         <p:nvSpPr>
-          <p:cNvPr id="696" name="TextBox 13"/>
+          <p:cNvPr id="697" name="TextBox 13"/>
           <p:cNvSpPr/>
           <p:nvPr/>
         </p:nvSpPr>
@@ -41374,7 +41420,7 @@
       </p:sp>
       <p:sp>
         <p:nvSpPr>
-          <p:cNvPr id="697" name="Rounded Rectangle 14"/>
+          <p:cNvPr id="698" name="Rounded Rectangle 14"/>
           <p:cNvSpPr/>
           <p:nvPr/>
         </p:nvSpPr>
@@ -41440,7 +41486,7 @@
       </p:sp>
       <p:sp>
         <p:nvSpPr>
-          <p:cNvPr id="698" name="TextBox 15"/>
+          <p:cNvPr id="699" name="TextBox 15"/>
           <p:cNvSpPr/>
           <p:nvPr/>
         </p:nvSpPr>
@@ -41538,7 +41584,7 @@
       </p:grpSpPr>
       <p:sp>
         <p:nvSpPr>
-          <p:cNvPr id="699" name="TextBox 1"/>
+          <p:cNvPr id="700" name="TextBox 1"/>
           <p:cNvSpPr/>
           <p:nvPr/>
         </p:nvSpPr>
@@ -41595,7 +41641,7 @@
       </p:sp>
       <p:sp>
         <p:nvSpPr>
-          <p:cNvPr id="700" name="TextBox 2"/>
+          <p:cNvPr id="701" name="TextBox 2"/>
           <p:cNvSpPr/>
           <p:nvPr/>
         </p:nvSpPr>
@@ -41652,7 +41698,7 @@
       </p:sp>
       <p:cxnSp>
         <p:nvCxnSpPr>
-          <p:cNvPr id="701" name="Connector 3"/>
+          <p:cNvPr id="702" name="Connector 3"/>
           <p:cNvCxnSpPr/>
           <p:nvPr/>
         </p:nvCxnSpPr>
@@ -41674,7 +41720,7 @@
       </p:cxnSp>
       <p:sp>
         <p:nvSpPr>
-          <p:cNvPr id="702" name="TextBox 4"/>
+          <p:cNvPr id="703" name="TextBox 4"/>
           <p:cNvSpPr/>
           <p:nvPr/>
         </p:nvSpPr>
@@ -41731,7 +41777,7 @@
       </p:sp>
       <p:sp>
         <p:nvSpPr>
-          <p:cNvPr id="703" name="TextBox 5"/>
+          <p:cNvPr id="704" name="TextBox 5"/>
           <p:cNvSpPr/>
           <p:nvPr/>
         </p:nvSpPr>
@@ -41788,7 +41834,7 @@
       </p:sp>
       <p:sp>
         <p:nvSpPr>
-          <p:cNvPr id="704" name="Rectangle 6"/>
+          <p:cNvPr id="705" name="Rectangle 6"/>
           <p:cNvSpPr/>
           <p:nvPr/>
         </p:nvSpPr>
@@ -41849,7 +41895,7 @@
       </p:sp>
       <p:sp>
         <p:nvSpPr>
-          <p:cNvPr id="705" name="TextBox 7"/>
+          <p:cNvPr id="706" name="TextBox 7"/>
           <p:cNvSpPr/>
           <p:nvPr/>
         </p:nvSpPr>
@@ -41906,7 +41952,7 @@
       </p:sp>
       <p:sp>
         <p:nvSpPr>
-          <p:cNvPr id="706" name="Rounded Rectangle 8"/>
+          <p:cNvPr id="707" name="Rounded Rectangle 8"/>
           <p:cNvSpPr/>
           <p:nvPr/>
         </p:nvSpPr>
@@ -41972,7 +42018,7 @@
       </p:sp>
       <p:sp>
         <p:nvSpPr>
-          <p:cNvPr id="707" name="TextBox 9"/>
+          <p:cNvPr id="708" name="TextBox 9"/>
           <p:cNvSpPr/>
           <p:nvPr/>
         </p:nvSpPr>
@@ -42040,7 +42086,7 @@
       </p:sp>
       <p:sp>
         <p:nvSpPr>
-          <p:cNvPr id="708" name="Rounded Rectangle 10"/>
+          <p:cNvPr id="709" name="Rounded Rectangle 10"/>
           <p:cNvSpPr/>
           <p:nvPr/>
         </p:nvSpPr>
@@ -42106,7 +42152,7 @@
       </p:sp>
       <p:sp>
         <p:nvSpPr>
-          <p:cNvPr id="709" name="TextBox 11"/>
+          <p:cNvPr id="710" name="TextBox 11"/>
           <p:cNvSpPr/>
           <p:nvPr/>
         </p:nvSpPr>
@@ -42174,7 +42220,7 @@
       </p:sp>
       <p:sp>
         <p:nvSpPr>
-          <p:cNvPr id="710" name="Rounded Rectangle 12"/>
+          <p:cNvPr id="711" name="Rounded Rectangle 12"/>
           <p:cNvSpPr/>
           <p:nvPr/>
         </p:nvSpPr>
@@ -42240,14 +42286,14 @@
       </p:sp>
       <p:sp>
         <p:nvSpPr>
-          <p:cNvPr id="711" name="TextBox 13"/>
+          <p:cNvPr id="712" name="TextBox 13"/>
           <p:cNvSpPr/>
           <p:nvPr/>
         </p:nvSpPr>
         <p:spPr>
           <a:xfrm>
             <a:off x="914400" y="3310200"/>
-            <a:ext cx="10362600" cy="365400"/>
+            <a:ext cx="8259480" cy="365400"/>
           </a:xfrm>
           <a:prstGeom prst="rect">
             <a:avLst/>
@@ -42295,6 +42341,52 @@
               </a:rPr>
               <a:t>Текст статьи, которую представляет вершина</a:t>
             </a:r>
+            <a:endParaRPr b="0" lang="ru-RU" sz="1500" strike="noStrike" u="none">
+              <a:solidFill>
+                <a:srgbClr val="000000"/>
+              </a:solidFill>
+              <a:effectLst/>
+              <a:uFillTx/>
+              <a:latin typeface="Arial"/>
+            </a:endParaRPr>
+          </a:p>
+        </p:txBody>
+      </p:sp>
+      <p:sp>
+        <p:nvSpPr>
+          <p:cNvPr id="713" name="TextBox 14"/>
+          <p:cNvSpPr/>
+          <p:nvPr/>
+        </p:nvSpPr>
+        <p:spPr>
+          <a:xfrm>
+            <a:off x="9174240" y="3328560"/>
+            <a:ext cx="2102760" cy="365400"/>
+          </a:xfrm>
+          <a:prstGeom prst="rect">
+            <a:avLst/>
+          </a:prstGeom>
+          <a:noFill/>
+          <a:ln w="0">
+            <a:noFill/>
+          </a:ln>
+        </p:spPr>
+        <p:style>
+          <a:lnRef idx="0"/>
+          <a:fillRef idx="0"/>
+          <a:effectRef idx="0"/>
+          <a:fontRef idx="minor"/>
+        </p:style>
+        <p:txBody>
+          <a:bodyPr lIns="0" rIns="0" tIns="0" bIns="0" anchor="t">
+            <a:spAutoFit/>
+          </a:bodyPr>
+          <a:p>
+            <a:pPr algn="r" defTabSz="457200">
+              <a:lnSpc>
+                <a:spcPct val="100000"/>
+              </a:lnSpc>
+            </a:pPr>
             <a:r>
               <a:rPr b="1" lang="en-US" sz="1300" strike="noStrike" u="none">
                 <a:solidFill>
@@ -42304,7 +42396,7 @@
                 <a:uFillTx/>
                 <a:latin typeface="Arial"/>
               </a:rPr>
-              <a:t>     ✓ правильный ответ</a:t>
+              <a:t>✓ правильный ответ</a:t>
             </a:r>
             <a:endParaRPr b="0" lang="ru-RU" sz="1300" strike="noStrike" u="none">
               <a:solidFill>
@@ -42319,7 +42411,7 @@
       </p:sp>
       <p:sp>
         <p:nvSpPr>
-          <p:cNvPr id="712" name="Rounded Rectangle 14"/>
+          <p:cNvPr id="714" name="Rounded Rectangle 15"/>
           <p:cNvSpPr/>
           <p:nvPr/>
         </p:nvSpPr>
@@ -42385,7 +42477,7 @@
       </p:sp>
       <p:sp>
         <p:nvSpPr>
-          <p:cNvPr id="713" name="TextBox 15"/>
+          <p:cNvPr id="715" name="TextBox 16"/>
           <p:cNvSpPr/>
           <p:nvPr/>
         </p:nvSpPr>
@@ -42453,7 +42545,7 @@
       </p:sp>
       <p:sp>
         <p:nvSpPr>
-          <p:cNvPr id="714" name="Rounded Rectangle 16"/>
+          <p:cNvPr id="716" name="Rounded Rectangle 17"/>
           <p:cNvSpPr/>
           <p:nvPr/>
         </p:nvSpPr>
@@ -42519,7 +42611,7 @@
       </p:sp>
       <p:sp>
         <p:nvSpPr>
-          <p:cNvPr id="715" name="TextBox 17"/>
+          <p:cNvPr id="717" name="TextBox 18"/>
           <p:cNvSpPr/>
           <p:nvPr/>
         </p:nvSpPr>
@@ -43189,7 +43281,7 @@
       </p:grpSpPr>
       <p:sp>
         <p:nvSpPr>
-          <p:cNvPr id="716" name="TextBox 1"/>
+          <p:cNvPr id="718" name="TextBox 1"/>
           <p:cNvSpPr/>
           <p:nvPr/>
         </p:nvSpPr>
@@ -43246,7 +43338,7 @@
       </p:sp>
       <p:sp>
         <p:nvSpPr>
-          <p:cNvPr id="717" name="TextBox 2"/>
+          <p:cNvPr id="719" name="TextBox 2"/>
           <p:cNvSpPr/>
           <p:nvPr/>
         </p:nvSpPr>
@@ -43303,7 +43395,7 @@
       </p:sp>
       <p:cxnSp>
         <p:nvCxnSpPr>
-          <p:cNvPr id="718" name="Connector 3"/>
+          <p:cNvPr id="720" name="Connector 3"/>
           <p:cNvCxnSpPr/>
           <p:nvPr/>
         </p:nvCxnSpPr>
@@ -43325,7 +43417,7 @@
       </p:cxnSp>
       <p:sp>
         <p:nvSpPr>
-          <p:cNvPr id="719" name="TextBox 4"/>
+          <p:cNvPr id="721" name="TextBox 4"/>
           <p:cNvSpPr/>
           <p:nvPr/>
         </p:nvSpPr>
@@ -43382,7 +43474,7 @@
       </p:sp>
       <p:sp>
         <p:nvSpPr>
-          <p:cNvPr id="720" name="TextBox 5"/>
+          <p:cNvPr id="722" name="TextBox 5"/>
           <p:cNvSpPr/>
           <p:nvPr/>
         </p:nvSpPr>
@@ -43439,7 +43531,7 @@
       </p:sp>
       <p:sp>
         <p:nvSpPr>
-          <p:cNvPr id="721" name="Rectangle 6"/>
+          <p:cNvPr id="723" name="Rectangle 6"/>
           <p:cNvSpPr/>
           <p:nvPr/>
         </p:nvSpPr>
@@ -43500,7 +43592,7 @@
       </p:sp>
       <p:sp>
         <p:nvSpPr>
-          <p:cNvPr id="722" name="TextBox 7"/>
+          <p:cNvPr id="724" name="TextBox 7"/>
           <p:cNvSpPr/>
           <p:nvPr/>
         </p:nvSpPr>
@@ -43779,7 +43871,7 @@
       </p:grpSpPr>
       <p:sp>
         <p:nvSpPr>
-          <p:cNvPr id="723" name="Rectangle 1"/>
+          <p:cNvPr id="725" name="Rectangle 1"/>
           <p:cNvSpPr/>
           <p:nvPr/>
         </p:nvSpPr>
@@ -43840,7 +43932,7 @@
       </p:sp>
       <p:sp>
         <p:nvSpPr>
-          <p:cNvPr id="724" name="TextBox 2"/>
+          <p:cNvPr id="726" name="TextBox 2"/>
           <p:cNvSpPr/>
           <p:nvPr/>
         </p:nvSpPr>
@@ -43897,7 +43989,7 @@
       </p:sp>
       <p:sp>
         <p:nvSpPr>
-          <p:cNvPr id="725" name="TextBox 3"/>
+          <p:cNvPr id="727" name="TextBox 3"/>
           <p:cNvSpPr/>
           <p:nvPr/>
         </p:nvSpPr>
@@ -43984,7 +44076,7 @@
       </p:grpSpPr>
       <p:sp>
         <p:nvSpPr>
-          <p:cNvPr id="726" name="TextBox 1"/>
+          <p:cNvPr id="728" name="TextBox 1"/>
           <p:cNvSpPr/>
           <p:nvPr/>
         </p:nvSpPr>
@@ -44041,7 +44133,7 @@
       </p:sp>
       <p:sp>
         <p:nvSpPr>
-          <p:cNvPr id="727" name="TextBox 2"/>
+          <p:cNvPr id="729" name="TextBox 2"/>
           <p:cNvSpPr/>
           <p:nvPr/>
         </p:nvSpPr>
@@ -44098,7 +44190,7 @@
       </p:sp>
       <p:cxnSp>
         <p:nvCxnSpPr>
-          <p:cNvPr id="728" name="Connector 3"/>
+          <p:cNvPr id="730" name="Connector 3"/>
           <p:cNvCxnSpPr/>
           <p:nvPr/>
         </p:nvCxnSpPr>
@@ -44120,7 +44212,7 @@
       </p:cxnSp>
       <p:sp>
         <p:nvSpPr>
-          <p:cNvPr id="729" name="TextBox 4"/>
+          <p:cNvPr id="731" name="TextBox 4"/>
           <p:cNvSpPr/>
           <p:nvPr/>
         </p:nvSpPr>
@@ -44177,7 +44269,7 @@
       </p:sp>
       <p:sp>
         <p:nvSpPr>
-          <p:cNvPr id="730" name="TextBox 5"/>
+          <p:cNvPr id="732" name="TextBox 5"/>
           <p:cNvSpPr/>
           <p:nvPr/>
         </p:nvSpPr>
@@ -44234,7 +44326,7 @@
       </p:sp>
       <p:sp>
         <p:nvSpPr>
-          <p:cNvPr id="731" name="Rectangle 6"/>
+          <p:cNvPr id="733" name="Rectangle 6"/>
           <p:cNvSpPr/>
           <p:nvPr/>
         </p:nvSpPr>
@@ -44295,7 +44387,7 @@
       </p:sp>
       <p:sp>
         <p:nvSpPr>
-          <p:cNvPr id="732" name="Rounded Rectangle 7"/>
+          <p:cNvPr id="734" name="Rounded Rectangle 7"/>
           <p:cNvSpPr/>
           <p:nvPr/>
         </p:nvSpPr>
@@ -44361,7 +44453,7 @@
       </p:sp>
       <p:sp>
         <p:nvSpPr>
-          <p:cNvPr id="733" name="TextBox 8"/>
+          <p:cNvPr id="735" name="TextBox 8"/>
           <p:cNvSpPr/>
           <p:nvPr/>
         </p:nvSpPr>
@@ -44418,7 +44510,7 @@
       </p:sp>
       <p:sp>
         <p:nvSpPr>
-          <p:cNvPr id="734" name="TextBox 9"/>
+          <p:cNvPr id="736" name="TextBox 9"/>
           <p:cNvSpPr/>
           <p:nvPr/>
         </p:nvSpPr>
@@ -44569,7 +44661,7 @@
       </p:sp>
       <p:sp>
         <p:nvSpPr>
-          <p:cNvPr id="735" name="Rounded Rectangle 10"/>
+          <p:cNvPr id="737" name="Rounded Rectangle 10"/>
           <p:cNvSpPr/>
           <p:nvPr/>
         </p:nvSpPr>
@@ -44635,7 +44727,7 @@
       </p:sp>
       <p:sp>
         <p:nvSpPr>
-          <p:cNvPr id="736" name="TextBox 11"/>
+          <p:cNvPr id="738" name="TextBox 11"/>
           <p:cNvSpPr/>
           <p:nvPr/>
         </p:nvSpPr>
@@ -44692,7 +44784,7 @@
       </p:sp>
       <p:sp>
         <p:nvSpPr>
-          <p:cNvPr id="737" name="TextBox 12"/>
+          <p:cNvPr id="739" name="TextBox 12"/>
           <p:cNvSpPr/>
           <p:nvPr/>
         </p:nvSpPr>
@@ -44913,7 +45005,7 @@
       </p:grpSpPr>
       <p:sp>
         <p:nvSpPr>
-          <p:cNvPr id="738" name="TextBox 1"/>
+          <p:cNvPr id="740" name="TextBox 1"/>
           <p:cNvSpPr/>
           <p:nvPr/>
         </p:nvSpPr>
@@ -44970,7 +45062,7 @@
       </p:sp>
       <p:sp>
         <p:nvSpPr>
-          <p:cNvPr id="739" name="TextBox 2"/>
+          <p:cNvPr id="741" name="TextBox 2"/>
           <p:cNvSpPr/>
           <p:nvPr/>
         </p:nvSpPr>
@@ -45027,7 +45119,7 @@
       </p:sp>
       <p:cxnSp>
         <p:nvCxnSpPr>
-          <p:cNvPr id="740" name="Connector 3"/>
+          <p:cNvPr id="742" name="Connector 3"/>
           <p:cNvCxnSpPr/>
           <p:nvPr/>
         </p:nvCxnSpPr>
@@ -45049,7 +45141,7 @@
       </p:cxnSp>
       <p:sp>
         <p:nvSpPr>
-          <p:cNvPr id="741" name="TextBox 4"/>
+          <p:cNvPr id="743" name="TextBox 4"/>
           <p:cNvSpPr/>
           <p:nvPr/>
         </p:nvSpPr>
@@ -45106,7 +45198,7 @@
       </p:sp>
       <p:sp>
         <p:nvSpPr>
-          <p:cNvPr id="742" name="Rectangle 5"/>
+          <p:cNvPr id="744" name="Rectangle 5"/>
           <p:cNvSpPr/>
           <p:nvPr/>
         </p:nvSpPr>
@@ -45167,7 +45259,7 @@
       </p:sp>
       <p:sp>
         <p:nvSpPr>
-          <p:cNvPr id="743" name="Oval 6"/>
+          <p:cNvPr id="745" name="Oval 6"/>
           <p:cNvSpPr/>
           <p:nvPr/>
         </p:nvSpPr>
@@ -45239,7 +45331,7 @@
       </p:sp>
       <p:sp>
         <p:nvSpPr>
-          <p:cNvPr id="744" name="TextBox 7"/>
+          <p:cNvPr id="746" name="TextBox 7"/>
           <p:cNvSpPr/>
           <p:nvPr/>
         </p:nvSpPr>
@@ -45296,7 +45388,7 @@
       </p:sp>
       <p:sp>
         <p:nvSpPr>
-          <p:cNvPr id="745" name="Oval 8"/>
+          <p:cNvPr id="747" name="Oval 8"/>
           <p:cNvSpPr/>
           <p:nvPr/>
         </p:nvSpPr>
@@ -45368,7 +45460,7 @@
       </p:sp>
       <p:sp>
         <p:nvSpPr>
-          <p:cNvPr id="746" name="TextBox 9"/>
+          <p:cNvPr id="748" name="TextBox 9"/>
           <p:cNvSpPr/>
           <p:nvPr/>
         </p:nvSpPr>
@@ -45425,7 +45517,7 @@
       </p:sp>
       <p:sp>
         <p:nvSpPr>
-          <p:cNvPr id="747" name="Oval 10"/>
+          <p:cNvPr id="749" name="Oval 10"/>
           <p:cNvSpPr/>
           <p:nvPr/>
         </p:nvSpPr>
@@ -45497,7 +45589,7 @@
       </p:sp>
       <p:sp>
         <p:nvSpPr>
-          <p:cNvPr id="748" name="TextBox 11"/>
+          <p:cNvPr id="750" name="TextBox 11"/>
           <p:cNvSpPr/>
           <p:nvPr/>
         </p:nvSpPr>
@@ -45554,7 +45646,7 @@
       </p:sp>
       <p:sp>
         <p:nvSpPr>
-          <p:cNvPr id="749" name="Oval 12"/>
+          <p:cNvPr id="751" name="Oval 12"/>
           <p:cNvSpPr/>
           <p:nvPr/>
         </p:nvSpPr>
@@ -45626,7 +45718,7 @@
       </p:sp>
       <p:sp>
         <p:nvSpPr>
-          <p:cNvPr id="750" name="TextBox 13"/>
+          <p:cNvPr id="752" name="TextBox 13"/>
           <p:cNvSpPr/>
           <p:nvPr/>
         </p:nvSpPr>
@@ -45713,7 +45805,7 @@
       </p:grpSpPr>
       <p:sp>
         <p:nvSpPr>
-          <p:cNvPr id="751" name="TextBox 1"/>
+          <p:cNvPr id="753" name="TextBox 1"/>
           <p:cNvSpPr/>
           <p:nvPr/>
         </p:nvSpPr>
@@ -45770,7 +45862,7 @@
       </p:sp>
       <p:sp>
         <p:nvSpPr>
-          <p:cNvPr id="752" name="TextBox 2"/>
+          <p:cNvPr id="754" name="TextBox 2"/>
           <p:cNvSpPr/>
           <p:nvPr/>
         </p:nvSpPr>
@@ -45827,7 +45919,7 @@
       </p:sp>
       <p:cxnSp>
         <p:nvCxnSpPr>
-          <p:cNvPr id="753" name="Connector 3"/>
+          <p:cNvPr id="755" name="Connector 3"/>
           <p:cNvCxnSpPr/>
           <p:nvPr/>
         </p:nvCxnSpPr>
@@ -45849,7 +45941,7 @@
       </p:cxnSp>
       <p:sp>
         <p:nvSpPr>
-          <p:cNvPr id="754" name="TextBox 4"/>
+          <p:cNvPr id="756" name="TextBox 4"/>
           <p:cNvSpPr/>
           <p:nvPr/>
         </p:nvSpPr>
@@ -45906,7 +45998,7 @@
       </p:sp>
       <p:sp>
         <p:nvSpPr>
-          <p:cNvPr id="755" name="Rectangle 5"/>
+          <p:cNvPr id="757" name="Rectangle 5"/>
           <p:cNvSpPr/>
           <p:nvPr/>
         </p:nvSpPr>
@@ -45967,7 +46059,7 @@
       </p:sp>
       <p:sp>
         <p:nvSpPr>
-          <p:cNvPr id="756" name="TextBox 6"/>
+          <p:cNvPr id="758" name="TextBox 6"/>
           <p:cNvSpPr/>
           <p:nvPr/>
         </p:nvSpPr>
@@ -47646,7 +47738,7 @@
           <a:fontRef idx="minor"/>
         </p:style>
         <p:txBody>
-          <a:bodyPr lIns="90000" rIns="90000" tIns="45000" bIns="45000" anchor="ctr">
+          <a:bodyPr wrap="none" lIns="0" rIns="0" tIns="0" bIns="0" anchor="ctr">
             <a:noAutofit/>
           </a:bodyPr>
           <a:p>
@@ -47721,7 +47813,7 @@
           <a:fontRef idx="minor"/>
         </p:style>
         <p:txBody>
-          <a:bodyPr lIns="90000" rIns="90000" tIns="45000" bIns="45000" anchor="ctr">
+          <a:bodyPr wrap="none" lIns="0" rIns="0" tIns="0" bIns="0" anchor="ctr">
             <a:noAutofit/>
           </a:bodyPr>
           <a:p>
@@ -48968,7 +49060,7 @@
           <a:fontRef idx="minor"/>
         </p:style>
         <p:txBody>
-          <a:bodyPr lIns="90000" rIns="90000" tIns="45000" bIns="45000" anchor="ctr">
+          <a:bodyPr wrap="none" lIns="0" rIns="0" tIns="0" bIns="0" anchor="ctr">
             <a:noAutofit/>
           </a:bodyPr>
           <a:p>
@@ -49043,7 +49135,7 @@
           <a:fontRef idx="minor"/>
         </p:style>
         <p:txBody>
-          <a:bodyPr lIns="90000" rIns="90000" tIns="45000" bIns="45000" anchor="ctr">
+          <a:bodyPr wrap="none" lIns="0" rIns="0" tIns="0" bIns="0" anchor="ctr">
             <a:noAutofit/>
           </a:bodyPr>
           <a:p>
@@ -49118,7 +49210,7 @@
           <a:fontRef idx="minor"/>
         </p:style>
         <p:txBody>
-          <a:bodyPr lIns="90000" rIns="90000" tIns="45000" bIns="45000" anchor="ctr">
+          <a:bodyPr wrap="none" lIns="0" rIns="0" tIns="0" bIns="0" anchor="ctr">
             <a:noAutofit/>
           </a:bodyPr>
           <a:p>
@@ -49193,7 +49285,7 @@
           <a:fontRef idx="minor"/>
         </p:style>
         <p:txBody>
-          <a:bodyPr lIns="90000" rIns="90000" tIns="45000" bIns="45000" anchor="ctr">
+          <a:bodyPr wrap="none" lIns="0" rIns="0" tIns="0" bIns="0" anchor="ctr">
             <a:noAutofit/>
           </a:bodyPr>
           <a:p>
@@ -49268,7 +49360,7 @@
           <a:fontRef idx="minor"/>
         </p:style>
         <p:txBody>
-          <a:bodyPr lIns="90000" rIns="90000" tIns="45000" bIns="45000" anchor="ctr">
+          <a:bodyPr wrap="none" lIns="0" rIns="0" tIns="0" bIns="0" anchor="ctr">
             <a:noAutofit/>
           </a:bodyPr>
           <a:p>
@@ -49343,7 +49435,7 @@
           <a:fontRef idx="minor"/>
         </p:style>
         <p:txBody>
-          <a:bodyPr lIns="90000" rIns="90000" tIns="45000" bIns="45000" anchor="ctr">
+          <a:bodyPr wrap="none" lIns="0" rIns="0" tIns="0" bIns="0" anchor="ctr">
             <a:noAutofit/>
           </a:bodyPr>
           <a:p>
